--- a/住在你裡面(崇拜版).pptx
+++ b/住在你裡面(崇拜版).pptx
@@ -5,11 +5,15 @@
     <p:sldMasterId id="2147483660" r:id="rId1"/>
   </p:sldMasterIdLst>
   <p:notesMasterIdLst>
-    <p:notesMasterId r:id="rId4"/>
+    <p:notesMasterId r:id="rId8"/>
   </p:notesMasterIdLst>
   <p:sldIdLst>
-    <p:sldId id="256" r:id="rId2"/>
-    <p:sldId id="257" r:id="rId3"/>
+    <p:sldId id="634" r:id="rId2"/>
+    <p:sldId id="635" r:id="rId3"/>
+    <p:sldId id="636" r:id="rId4"/>
+    <p:sldId id="637" r:id="rId5"/>
+    <p:sldId id="638" r:id="rId6"/>
+    <p:sldId id="639" r:id="rId7"/>
   </p:sldIdLst>
   <p:sldSz cx="12192000" cy="6858000"/>
   <p:notesSz cx="6858000" cy="9144000"/>
@@ -209,7 +213,7 @@
           <a:p>
             <a:fld id="{0F51A00E-5F07-4A1F-B809-F7653DCCFF52}" type="datetimeFigureOut">
               <a:rPr lang="zh-TW" altLang="en-US" smtClean="0"/>
-              <a:t>2020/7/5</a:t>
+              <a:t>2024/4/13</a:t>
             </a:fld>
             <a:endParaRPr lang="zh-TW" altLang="en-US"/>
           </a:p>
@@ -275,38 +279,37 @@
           <a:p>
             <a:pPr lvl="0"/>
             <a:r>
-              <a:rPr lang="zh-TW" altLang="en-US" smtClean="0"/>
+              <a:rPr lang="zh-TW" altLang="en-US"/>
               <a:t>按一下以編輯母片文字樣式</a:t>
             </a:r>
           </a:p>
           <a:p>
             <a:pPr lvl="1"/>
             <a:r>
-              <a:rPr lang="zh-TW" altLang="en-US" smtClean="0"/>
+              <a:rPr lang="zh-TW" altLang="en-US"/>
               <a:t>第二層</a:t>
             </a:r>
           </a:p>
           <a:p>
             <a:pPr lvl="2"/>
             <a:r>
-              <a:rPr lang="zh-TW" altLang="en-US" smtClean="0"/>
+              <a:rPr lang="zh-TW" altLang="en-US"/>
               <a:t>第三層</a:t>
             </a:r>
           </a:p>
           <a:p>
             <a:pPr lvl="3"/>
             <a:r>
-              <a:rPr lang="zh-TW" altLang="en-US" smtClean="0"/>
+              <a:rPr lang="zh-TW" altLang="en-US"/>
               <a:t>第四層</a:t>
             </a:r>
           </a:p>
           <a:p>
             <a:pPr lvl="4"/>
             <a:r>
-              <a:rPr lang="zh-TW" altLang="en-US" smtClean="0"/>
+              <a:rPr lang="zh-TW" altLang="en-US"/>
               <a:t>第五層</a:t>
             </a:r>
-            <a:endParaRPr lang="zh-TW" altLang="en-US"/>
           </a:p>
         </p:txBody>
       </p:sp>
@@ -474,178 +477,6 @@
 </p:notesMaster>
 </file>
 
-<file path=ppt/notesSlides/notesSlide1.xml><?xml version="1.0" encoding="utf-8"?>
-<p:notes xmlns:a="http://schemas.openxmlformats.org/drawingml/2006/main" xmlns:r="http://schemas.openxmlformats.org/officeDocument/2006/relationships" xmlns:p="http://schemas.openxmlformats.org/presentationml/2006/main">
-  <p:cSld>
-    <p:spTree>
-      <p:nvGrpSpPr>
-        <p:cNvPr id="1" name=""/>
-        <p:cNvGrpSpPr/>
-        <p:nvPr/>
-      </p:nvGrpSpPr>
-      <p:grpSpPr>
-        <a:xfrm>
-          <a:off x="0" y="0"/>
-          <a:ext cx="0" cy="0"/>
-          <a:chOff x="0" y="0"/>
-          <a:chExt cx="0" cy="0"/>
-        </a:xfrm>
-      </p:grpSpPr>
-      <p:sp>
-        <p:nvSpPr>
-          <p:cNvPr id="2" name="投影片圖像版面配置區 1"/>
-          <p:cNvSpPr>
-            <a:spLocks noGrp="1" noRot="1" noChangeAspect="1"/>
-          </p:cNvSpPr>
-          <p:nvPr>
-            <p:ph type="sldImg"/>
-          </p:nvPr>
-        </p:nvSpPr>
-        <p:spPr>
-          <a:xfrm>
-            <a:off x="381000" y="685800"/>
-            <a:ext cx="6096000" cy="3429000"/>
-          </a:xfrm>
-        </p:spPr>
-      </p:sp>
-      <p:sp>
-        <p:nvSpPr>
-          <p:cNvPr id="3" name="備忘稿版面配置區 2"/>
-          <p:cNvSpPr>
-            <a:spLocks noGrp="1"/>
-          </p:cNvSpPr>
-          <p:nvPr>
-            <p:ph type="body" idx="1"/>
-          </p:nvPr>
-        </p:nvSpPr>
-        <p:spPr/>
-        <p:txBody>
-          <a:bodyPr>
-            <a:normAutofit/>
-          </a:bodyPr>
-          <a:lstStyle/>
-          <a:p>
-            <a:endParaRPr lang="zh-TW" altLang="en-US" dirty="0"/>
-          </a:p>
-        </p:txBody>
-      </p:sp>
-      <p:sp>
-        <p:nvSpPr>
-          <p:cNvPr id="4" name="投影片編號版面配置區 3"/>
-          <p:cNvSpPr>
-            <a:spLocks noGrp="1"/>
-          </p:cNvSpPr>
-          <p:nvPr>
-            <p:ph type="sldNum" sz="quarter" idx="10"/>
-          </p:nvPr>
-        </p:nvSpPr>
-        <p:spPr/>
-        <p:txBody>
-          <a:bodyPr/>
-          <a:lstStyle/>
-          <a:p>
-            <a:fld id="{8842650C-A2DE-4FF8-8378-A8F29D72DD8B}" type="slidenum">
-              <a:rPr lang="zh-TW" altLang="en-US" smtClean="0"/>
-              <a:t>1</a:t>
-            </a:fld>
-            <a:endParaRPr lang="zh-TW" altLang="en-US"/>
-          </a:p>
-        </p:txBody>
-      </p:sp>
-    </p:spTree>
-  </p:cSld>
-  <p:clrMapOvr>
-    <a:masterClrMapping/>
-  </p:clrMapOvr>
-</p:notes>
-</file>
-
-<file path=ppt/notesSlides/notesSlide2.xml><?xml version="1.0" encoding="utf-8"?>
-<p:notes xmlns:a="http://schemas.openxmlformats.org/drawingml/2006/main" xmlns:r="http://schemas.openxmlformats.org/officeDocument/2006/relationships" xmlns:p="http://schemas.openxmlformats.org/presentationml/2006/main">
-  <p:cSld>
-    <p:spTree>
-      <p:nvGrpSpPr>
-        <p:cNvPr id="1" name=""/>
-        <p:cNvGrpSpPr/>
-        <p:nvPr/>
-      </p:nvGrpSpPr>
-      <p:grpSpPr>
-        <a:xfrm>
-          <a:off x="0" y="0"/>
-          <a:ext cx="0" cy="0"/>
-          <a:chOff x="0" y="0"/>
-          <a:chExt cx="0" cy="0"/>
-        </a:xfrm>
-      </p:grpSpPr>
-      <p:sp>
-        <p:nvSpPr>
-          <p:cNvPr id="2" name="投影片圖像版面配置區 1"/>
-          <p:cNvSpPr>
-            <a:spLocks noGrp="1" noRot="1" noChangeAspect="1"/>
-          </p:cNvSpPr>
-          <p:nvPr>
-            <p:ph type="sldImg"/>
-          </p:nvPr>
-        </p:nvSpPr>
-        <p:spPr>
-          <a:xfrm>
-            <a:off x="381000" y="685800"/>
-            <a:ext cx="6096000" cy="3429000"/>
-          </a:xfrm>
-        </p:spPr>
-      </p:sp>
-      <p:sp>
-        <p:nvSpPr>
-          <p:cNvPr id="3" name="備忘稿版面配置區 2"/>
-          <p:cNvSpPr>
-            <a:spLocks noGrp="1"/>
-          </p:cNvSpPr>
-          <p:nvPr>
-            <p:ph type="body" idx="1"/>
-          </p:nvPr>
-        </p:nvSpPr>
-        <p:spPr/>
-        <p:txBody>
-          <a:bodyPr>
-            <a:normAutofit/>
-          </a:bodyPr>
-          <a:lstStyle/>
-          <a:p>
-            <a:endParaRPr lang="zh-TW" altLang="en-US" dirty="0"/>
-          </a:p>
-        </p:txBody>
-      </p:sp>
-      <p:sp>
-        <p:nvSpPr>
-          <p:cNvPr id="4" name="投影片編號版面配置區 3"/>
-          <p:cNvSpPr>
-            <a:spLocks noGrp="1"/>
-          </p:cNvSpPr>
-          <p:nvPr>
-            <p:ph type="sldNum" sz="quarter" idx="10"/>
-          </p:nvPr>
-        </p:nvSpPr>
-        <p:spPr/>
-        <p:txBody>
-          <a:bodyPr/>
-          <a:lstStyle/>
-          <a:p>
-            <a:fld id="{8842650C-A2DE-4FF8-8378-A8F29D72DD8B}" type="slidenum">
-              <a:rPr lang="zh-TW" altLang="en-US" smtClean="0"/>
-              <a:t>2</a:t>
-            </a:fld>
-            <a:endParaRPr lang="zh-TW" altLang="en-US"/>
-          </a:p>
-        </p:txBody>
-      </p:sp>
-    </p:spTree>
-  </p:cSld>
-  <p:clrMapOvr>
-    <a:masterClrMapping/>
-  </p:clrMapOvr>
-</p:notes>
-</file>
-
 <file path=ppt/slideLayouts/slideLayout1.xml><?xml version="1.0" encoding="utf-8"?>
 <p:sldLayout xmlns:a="http://schemas.openxmlformats.org/drawingml/2006/main" xmlns:r="http://schemas.openxmlformats.org/officeDocument/2006/relationships" xmlns:p="http://schemas.openxmlformats.org/presentationml/2006/main" type="title" preserve="1">
   <p:cSld name="標題投影片">
@@ -684,10 +515,9 @@
           <a:lstStyle/>
           <a:p>
             <a:r>
-              <a:rPr lang="zh-TW" altLang="en-US" smtClean="0"/>
+              <a:rPr lang="zh-TW" altLang="en-US"/>
               <a:t>按一下以編輯母片標題樣式</a:t>
             </a:r>
-            <a:endParaRPr lang="zh-TW" altLang="en-US"/>
           </a:p>
         </p:txBody>
       </p:sp>
@@ -803,10 +633,9 @@
           </a:lstStyle>
           <a:p>
             <a:r>
-              <a:rPr lang="zh-TW" altLang="en-US" smtClean="0"/>
+              <a:rPr lang="zh-TW" altLang="en-US"/>
               <a:t>按一下以編輯母片副標題樣式</a:t>
             </a:r>
-            <a:endParaRPr lang="zh-TW" altLang="en-US"/>
           </a:p>
         </p:txBody>
       </p:sp>
@@ -827,7 +656,7 @@
           <a:p>
             <a:fld id="{8CEF99E1-8971-47CE-9963-3B0E513A77C7}" type="datetimeFigureOut">
               <a:rPr lang="zh-TW" altLang="en-US" smtClean="0"/>
-              <a:t>2020/7/5</a:t>
+              <a:t>2024/4/13</a:t>
             </a:fld>
             <a:endParaRPr lang="zh-TW" altLang="en-US"/>
           </a:p>
@@ -916,10 +745,9 @@
           <a:lstStyle/>
           <a:p>
             <a:r>
-              <a:rPr lang="zh-TW" altLang="en-US" smtClean="0"/>
+              <a:rPr lang="zh-TW" altLang="en-US"/>
               <a:t>按一下以編輯母片標題樣式</a:t>
             </a:r>
-            <a:endParaRPr lang="zh-TW" altLang="en-US"/>
           </a:p>
         </p:txBody>
       </p:sp>
@@ -940,38 +768,37 @@
           <a:p>
             <a:pPr lvl="0"/>
             <a:r>
-              <a:rPr lang="zh-TW" altLang="en-US" smtClean="0"/>
+              <a:rPr lang="zh-TW" altLang="en-US"/>
               <a:t>按一下以編輯母片文字樣式</a:t>
             </a:r>
           </a:p>
           <a:p>
             <a:pPr lvl="1"/>
             <a:r>
-              <a:rPr lang="zh-TW" altLang="en-US" smtClean="0"/>
+              <a:rPr lang="zh-TW" altLang="en-US"/>
               <a:t>第二層</a:t>
             </a:r>
           </a:p>
           <a:p>
             <a:pPr lvl="2"/>
             <a:r>
-              <a:rPr lang="zh-TW" altLang="en-US" smtClean="0"/>
+              <a:rPr lang="zh-TW" altLang="en-US"/>
               <a:t>第三層</a:t>
             </a:r>
           </a:p>
           <a:p>
             <a:pPr lvl="3"/>
             <a:r>
-              <a:rPr lang="zh-TW" altLang="en-US" smtClean="0"/>
+              <a:rPr lang="zh-TW" altLang="en-US"/>
               <a:t>第四層</a:t>
             </a:r>
           </a:p>
           <a:p>
             <a:pPr lvl="4"/>
             <a:r>
-              <a:rPr lang="zh-TW" altLang="en-US" smtClean="0"/>
+              <a:rPr lang="zh-TW" altLang="en-US"/>
               <a:t>第五層</a:t>
             </a:r>
-            <a:endParaRPr lang="zh-TW" altLang="en-US"/>
           </a:p>
         </p:txBody>
       </p:sp>
@@ -992,7 +819,7 @@
           <a:p>
             <a:fld id="{8CEF99E1-8971-47CE-9963-3B0E513A77C7}" type="datetimeFigureOut">
               <a:rPr lang="zh-TW" altLang="en-US" smtClean="0"/>
-              <a:t>2020/7/5</a:t>
+              <a:t>2024/4/13</a:t>
             </a:fld>
             <a:endParaRPr lang="zh-TW" altLang="en-US"/>
           </a:p>
@@ -1086,10 +913,9 @@
           <a:lstStyle/>
           <a:p>
             <a:r>
-              <a:rPr lang="zh-TW" altLang="en-US" smtClean="0"/>
+              <a:rPr lang="zh-TW" altLang="en-US"/>
               <a:t>按一下以編輯母片標題樣式</a:t>
             </a:r>
-            <a:endParaRPr lang="zh-TW" altLang="en-US"/>
           </a:p>
         </p:txBody>
       </p:sp>
@@ -1115,38 +941,37 @@
           <a:p>
             <a:pPr lvl="0"/>
             <a:r>
-              <a:rPr lang="zh-TW" altLang="en-US" smtClean="0"/>
+              <a:rPr lang="zh-TW" altLang="en-US"/>
               <a:t>按一下以編輯母片文字樣式</a:t>
             </a:r>
           </a:p>
           <a:p>
             <a:pPr lvl="1"/>
             <a:r>
-              <a:rPr lang="zh-TW" altLang="en-US" smtClean="0"/>
+              <a:rPr lang="zh-TW" altLang="en-US"/>
               <a:t>第二層</a:t>
             </a:r>
           </a:p>
           <a:p>
             <a:pPr lvl="2"/>
             <a:r>
-              <a:rPr lang="zh-TW" altLang="en-US" smtClean="0"/>
+              <a:rPr lang="zh-TW" altLang="en-US"/>
               <a:t>第三層</a:t>
             </a:r>
           </a:p>
           <a:p>
             <a:pPr lvl="3"/>
             <a:r>
-              <a:rPr lang="zh-TW" altLang="en-US" smtClean="0"/>
+              <a:rPr lang="zh-TW" altLang="en-US"/>
               <a:t>第四層</a:t>
             </a:r>
           </a:p>
           <a:p>
             <a:pPr lvl="4"/>
             <a:r>
-              <a:rPr lang="zh-TW" altLang="en-US" smtClean="0"/>
+              <a:rPr lang="zh-TW" altLang="en-US"/>
               <a:t>第五層</a:t>
             </a:r>
-            <a:endParaRPr lang="zh-TW" altLang="en-US"/>
           </a:p>
         </p:txBody>
       </p:sp>
@@ -1167,7 +992,7 @@
           <a:p>
             <a:fld id="{8CEF99E1-8971-47CE-9963-3B0E513A77C7}" type="datetimeFigureOut">
               <a:rPr lang="zh-TW" altLang="en-US" smtClean="0"/>
-              <a:t>2020/7/5</a:t>
+              <a:t>2024/4/13</a:t>
             </a:fld>
             <a:endParaRPr lang="zh-TW" altLang="en-US"/>
           </a:p>
@@ -1256,10 +1081,9 @@
           <a:lstStyle/>
           <a:p>
             <a:r>
-              <a:rPr lang="zh-TW" altLang="en-US" smtClean="0"/>
+              <a:rPr lang="zh-TW" altLang="en-US"/>
               <a:t>按一下以編輯母片標題樣式</a:t>
             </a:r>
-            <a:endParaRPr lang="zh-TW" altLang="en-US"/>
           </a:p>
         </p:txBody>
       </p:sp>
@@ -1280,38 +1104,37 @@
           <a:p>
             <a:pPr lvl="0"/>
             <a:r>
-              <a:rPr lang="zh-TW" altLang="en-US" smtClean="0"/>
+              <a:rPr lang="zh-TW" altLang="en-US"/>
               <a:t>按一下以編輯母片文字樣式</a:t>
             </a:r>
           </a:p>
           <a:p>
             <a:pPr lvl="1"/>
             <a:r>
-              <a:rPr lang="zh-TW" altLang="en-US" smtClean="0"/>
+              <a:rPr lang="zh-TW" altLang="en-US"/>
               <a:t>第二層</a:t>
             </a:r>
           </a:p>
           <a:p>
             <a:pPr lvl="2"/>
             <a:r>
-              <a:rPr lang="zh-TW" altLang="en-US" smtClean="0"/>
+              <a:rPr lang="zh-TW" altLang="en-US"/>
               <a:t>第三層</a:t>
             </a:r>
           </a:p>
           <a:p>
             <a:pPr lvl="3"/>
             <a:r>
-              <a:rPr lang="zh-TW" altLang="en-US" smtClean="0"/>
+              <a:rPr lang="zh-TW" altLang="en-US"/>
               <a:t>第四層</a:t>
             </a:r>
           </a:p>
           <a:p>
             <a:pPr lvl="4"/>
             <a:r>
-              <a:rPr lang="zh-TW" altLang="en-US" smtClean="0"/>
+              <a:rPr lang="zh-TW" altLang="en-US"/>
               <a:t>第五層</a:t>
             </a:r>
-            <a:endParaRPr lang="zh-TW" altLang="en-US"/>
           </a:p>
         </p:txBody>
       </p:sp>
@@ -1332,7 +1155,7 @@
           <a:p>
             <a:fld id="{8CEF99E1-8971-47CE-9963-3B0E513A77C7}" type="datetimeFigureOut">
               <a:rPr lang="zh-TW" altLang="en-US" smtClean="0"/>
-              <a:t>2020/7/5</a:t>
+              <a:t>2024/4/13</a:t>
             </a:fld>
             <a:endParaRPr lang="zh-TW" altLang="en-US"/>
           </a:p>
@@ -1430,10 +1253,9 @@
           </a:lstStyle>
           <a:p>
             <a:r>
-              <a:rPr lang="zh-TW" altLang="en-US" smtClean="0"/>
+              <a:rPr lang="zh-TW" altLang="en-US"/>
               <a:t>按一下以編輯母片標題樣式</a:t>
             </a:r>
-            <a:endParaRPr lang="zh-TW" altLang="en-US"/>
           </a:p>
         </p:txBody>
       </p:sp>
@@ -1550,7 +1372,7 @@
           <a:p>
             <a:pPr lvl="0"/>
             <a:r>
-              <a:rPr lang="zh-TW" altLang="en-US" smtClean="0"/>
+              <a:rPr lang="zh-TW" altLang="en-US"/>
               <a:t>按一下以編輯母片文字樣式</a:t>
             </a:r>
           </a:p>
@@ -1573,7 +1395,7 @@
           <a:p>
             <a:fld id="{8CEF99E1-8971-47CE-9963-3B0E513A77C7}" type="datetimeFigureOut">
               <a:rPr lang="zh-TW" altLang="en-US" smtClean="0"/>
-              <a:t>2020/7/5</a:t>
+              <a:t>2024/4/13</a:t>
             </a:fld>
             <a:endParaRPr lang="zh-TW" altLang="en-US"/>
           </a:p>
@@ -1662,10 +1484,9 @@
           <a:lstStyle/>
           <a:p>
             <a:r>
-              <a:rPr lang="zh-TW" altLang="en-US" smtClean="0"/>
+              <a:rPr lang="zh-TW" altLang="en-US"/>
               <a:t>按一下以編輯母片標題樣式</a:t>
             </a:r>
-            <a:endParaRPr lang="zh-TW" altLang="en-US"/>
           </a:p>
         </p:txBody>
       </p:sp>
@@ -1719,38 +1540,37 @@
           <a:p>
             <a:pPr lvl="0"/>
             <a:r>
-              <a:rPr lang="zh-TW" altLang="en-US" smtClean="0"/>
+              <a:rPr lang="zh-TW" altLang="en-US"/>
               <a:t>按一下以編輯母片文字樣式</a:t>
             </a:r>
           </a:p>
           <a:p>
             <a:pPr lvl="1"/>
             <a:r>
-              <a:rPr lang="zh-TW" altLang="en-US" smtClean="0"/>
+              <a:rPr lang="zh-TW" altLang="en-US"/>
               <a:t>第二層</a:t>
             </a:r>
           </a:p>
           <a:p>
             <a:pPr lvl="2"/>
             <a:r>
-              <a:rPr lang="zh-TW" altLang="en-US" smtClean="0"/>
+              <a:rPr lang="zh-TW" altLang="en-US"/>
               <a:t>第三層</a:t>
             </a:r>
           </a:p>
           <a:p>
             <a:pPr lvl="3"/>
             <a:r>
-              <a:rPr lang="zh-TW" altLang="en-US" smtClean="0"/>
+              <a:rPr lang="zh-TW" altLang="en-US"/>
               <a:t>第四層</a:t>
             </a:r>
           </a:p>
           <a:p>
             <a:pPr lvl="4"/>
             <a:r>
-              <a:rPr lang="zh-TW" altLang="en-US" smtClean="0"/>
+              <a:rPr lang="zh-TW" altLang="en-US"/>
               <a:t>第五層</a:t>
             </a:r>
-            <a:endParaRPr lang="zh-TW" altLang="en-US"/>
           </a:p>
         </p:txBody>
       </p:sp>
@@ -1804,38 +1624,37 @@
           <a:p>
             <a:pPr lvl="0"/>
             <a:r>
-              <a:rPr lang="zh-TW" altLang="en-US" smtClean="0"/>
+              <a:rPr lang="zh-TW" altLang="en-US"/>
               <a:t>按一下以編輯母片文字樣式</a:t>
             </a:r>
           </a:p>
           <a:p>
             <a:pPr lvl="1"/>
             <a:r>
-              <a:rPr lang="zh-TW" altLang="en-US" smtClean="0"/>
+              <a:rPr lang="zh-TW" altLang="en-US"/>
               <a:t>第二層</a:t>
             </a:r>
           </a:p>
           <a:p>
             <a:pPr lvl="2"/>
             <a:r>
-              <a:rPr lang="zh-TW" altLang="en-US" smtClean="0"/>
+              <a:rPr lang="zh-TW" altLang="en-US"/>
               <a:t>第三層</a:t>
             </a:r>
           </a:p>
           <a:p>
             <a:pPr lvl="3"/>
             <a:r>
-              <a:rPr lang="zh-TW" altLang="en-US" smtClean="0"/>
+              <a:rPr lang="zh-TW" altLang="en-US"/>
               <a:t>第四層</a:t>
             </a:r>
           </a:p>
           <a:p>
             <a:pPr lvl="4"/>
             <a:r>
-              <a:rPr lang="zh-TW" altLang="en-US" smtClean="0"/>
+              <a:rPr lang="zh-TW" altLang="en-US"/>
               <a:t>第五層</a:t>
             </a:r>
-            <a:endParaRPr lang="zh-TW" altLang="en-US"/>
           </a:p>
         </p:txBody>
       </p:sp>
@@ -1856,7 +1675,7 @@
           <a:p>
             <a:fld id="{8CEF99E1-8971-47CE-9963-3B0E513A77C7}" type="datetimeFigureOut">
               <a:rPr lang="zh-TW" altLang="en-US" smtClean="0"/>
-              <a:t>2020/7/5</a:t>
+              <a:t>2024/4/13</a:t>
             </a:fld>
             <a:endParaRPr lang="zh-TW" altLang="en-US"/>
           </a:p>
@@ -1949,10 +1768,9 @@
           </a:lstStyle>
           <a:p>
             <a:r>
-              <a:rPr lang="zh-TW" altLang="en-US" smtClean="0"/>
+              <a:rPr lang="zh-TW" altLang="en-US"/>
               <a:t>按一下以編輯母片標題樣式</a:t>
             </a:r>
-            <a:endParaRPr lang="zh-TW" altLang="en-US"/>
           </a:p>
         </p:txBody>
       </p:sp>
@@ -2015,7 +1833,7 @@
           <a:p>
             <a:pPr lvl="0"/>
             <a:r>
-              <a:rPr lang="zh-TW" altLang="en-US" smtClean="0"/>
+              <a:rPr lang="zh-TW" altLang="en-US"/>
               <a:t>按一下以編輯母片文字樣式</a:t>
             </a:r>
           </a:p>
@@ -2071,38 +1889,37 @@
           <a:p>
             <a:pPr lvl="0"/>
             <a:r>
-              <a:rPr lang="zh-TW" altLang="en-US" smtClean="0"/>
+              <a:rPr lang="zh-TW" altLang="en-US"/>
               <a:t>按一下以編輯母片文字樣式</a:t>
             </a:r>
           </a:p>
           <a:p>
             <a:pPr lvl="1"/>
             <a:r>
-              <a:rPr lang="zh-TW" altLang="en-US" smtClean="0"/>
+              <a:rPr lang="zh-TW" altLang="en-US"/>
               <a:t>第二層</a:t>
             </a:r>
           </a:p>
           <a:p>
             <a:pPr lvl="2"/>
             <a:r>
-              <a:rPr lang="zh-TW" altLang="en-US" smtClean="0"/>
+              <a:rPr lang="zh-TW" altLang="en-US"/>
               <a:t>第三層</a:t>
             </a:r>
           </a:p>
           <a:p>
             <a:pPr lvl="3"/>
             <a:r>
-              <a:rPr lang="zh-TW" altLang="en-US" smtClean="0"/>
+              <a:rPr lang="zh-TW" altLang="en-US"/>
               <a:t>第四層</a:t>
             </a:r>
           </a:p>
           <a:p>
             <a:pPr lvl="4"/>
             <a:r>
-              <a:rPr lang="zh-TW" altLang="en-US" smtClean="0"/>
+              <a:rPr lang="zh-TW" altLang="en-US"/>
               <a:t>第五層</a:t>
             </a:r>
-            <a:endParaRPr lang="zh-TW" altLang="en-US"/>
           </a:p>
         </p:txBody>
       </p:sp>
@@ -2165,7 +1982,7 @@
           <a:p>
             <a:pPr lvl="0"/>
             <a:r>
-              <a:rPr lang="zh-TW" altLang="en-US" smtClean="0"/>
+              <a:rPr lang="zh-TW" altLang="en-US"/>
               <a:t>按一下以編輯母片文字樣式</a:t>
             </a:r>
           </a:p>
@@ -2221,38 +2038,37 @@
           <a:p>
             <a:pPr lvl="0"/>
             <a:r>
-              <a:rPr lang="zh-TW" altLang="en-US" smtClean="0"/>
+              <a:rPr lang="zh-TW" altLang="en-US"/>
               <a:t>按一下以編輯母片文字樣式</a:t>
             </a:r>
           </a:p>
           <a:p>
             <a:pPr lvl="1"/>
             <a:r>
-              <a:rPr lang="zh-TW" altLang="en-US" smtClean="0"/>
+              <a:rPr lang="zh-TW" altLang="en-US"/>
               <a:t>第二層</a:t>
             </a:r>
           </a:p>
           <a:p>
             <a:pPr lvl="2"/>
             <a:r>
-              <a:rPr lang="zh-TW" altLang="en-US" smtClean="0"/>
+              <a:rPr lang="zh-TW" altLang="en-US"/>
               <a:t>第三層</a:t>
             </a:r>
           </a:p>
           <a:p>
             <a:pPr lvl="3"/>
             <a:r>
-              <a:rPr lang="zh-TW" altLang="en-US" smtClean="0"/>
+              <a:rPr lang="zh-TW" altLang="en-US"/>
               <a:t>第四層</a:t>
             </a:r>
           </a:p>
           <a:p>
             <a:pPr lvl="4"/>
             <a:r>
-              <a:rPr lang="zh-TW" altLang="en-US" smtClean="0"/>
+              <a:rPr lang="zh-TW" altLang="en-US"/>
               <a:t>第五層</a:t>
             </a:r>
-            <a:endParaRPr lang="zh-TW" altLang="en-US"/>
           </a:p>
         </p:txBody>
       </p:sp>
@@ -2273,7 +2089,7 @@
           <a:p>
             <a:fld id="{8CEF99E1-8971-47CE-9963-3B0E513A77C7}" type="datetimeFigureOut">
               <a:rPr lang="zh-TW" altLang="en-US" smtClean="0"/>
-              <a:t>2020/7/5</a:t>
+              <a:t>2024/4/13</a:t>
             </a:fld>
             <a:endParaRPr lang="zh-TW" altLang="en-US"/>
           </a:p>
@@ -2362,10 +2178,9 @@
           <a:lstStyle/>
           <a:p>
             <a:r>
-              <a:rPr lang="zh-TW" altLang="en-US" smtClean="0"/>
+              <a:rPr lang="zh-TW" altLang="en-US"/>
               <a:t>按一下以編輯母片標題樣式</a:t>
             </a:r>
-            <a:endParaRPr lang="zh-TW" altLang="en-US"/>
           </a:p>
         </p:txBody>
       </p:sp>
@@ -2386,7 +2201,7 @@
           <a:p>
             <a:fld id="{8CEF99E1-8971-47CE-9963-3B0E513A77C7}" type="datetimeFigureOut">
               <a:rPr lang="zh-TW" altLang="en-US" smtClean="0"/>
-              <a:t>2020/7/5</a:t>
+              <a:t>2024/4/13</a:t>
             </a:fld>
             <a:endParaRPr lang="zh-TW" altLang="en-US"/>
           </a:p>
@@ -2476,7 +2291,7 @@
           <a:p>
             <a:fld id="{8CEF99E1-8971-47CE-9963-3B0E513A77C7}" type="datetimeFigureOut">
               <a:rPr lang="zh-TW" altLang="en-US" smtClean="0"/>
-              <a:t>2020/7/5</a:t>
+              <a:t>2024/4/13</a:t>
             </a:fld>
             <a:endParaRPr lang="zh-TW" altLang="en-US"/>
           </a:p>
@@ -2574,10 +2389,9 @@
           </a:lstStyle>
           <a:p>
             <a:r>
-              <a:rPr lang="zh-TW" altLang="en-US" smtClean="0"/>
+              <a:rPr lang="zh-TW" altLang="en-US"/>
               <a:t>按一下以編輯母片標題樣式</a:t>
             </a:r>
-            <a:endParaRPr lang="zh-TW" altLang="en-US"/>
           </a:p>
         </p:txBody>
       </p:sp>
@@ -2631,38 +2445,37 @@
           <a:p>
             <a:pPr lvl="0"/>
             <a:r>
-              <a:rPr lang="zh-TW" altLang="en-US" smtClean="0"/>
+              <a:rPr lang="zh-TW" altLang="en-US"/>
               <a:t>按一下以編輯母片文字樣式</a:t>
             </a:r>
           </a:p>
           <a:p>
             <a:pPr lvl="1"/>
             <a:r>
-              <a:rPr lang="zh-TW" altLang="en-US" smtClean="0"/>
+              <a:rPr lang="zh-TW" altLang="en-US"/>
               <a:t>第二層</a:t>
             </a:r>
           </a:p>
           <a:p>
             <a:pPr lvl="2"/>
             <a:r>
-              <a:rPr lang="zh-TW" altLang="en-US" smtClean="0"/>
+              <a:rPr lang="zh-TW" altLang="en-US"/>
               <a:t>第三層</a:t>
             </a:r>
           </a:p>
           <a:p>
             <a:pPr lvl="3"/>
             <a:r>
-              <a:rPr lang="zh-TW" altLang="en-US" smtClean="0"/>
+              <a:rPr lang="zh-TW" altLang="en-US"/>
               <a:t>第四層</a:t>
             </a:r>
           </a:p>
           <a:p>
             <a:pPr lvl="4"/>
             <a:r>
-              <a:rPr lang="zh-TW" altLang="en-US" smtClean="0"/>
+              <a:rPr lang="zh-TW" altLang="en-US"/>
               <a:t>第五層</a:t>
             </a:r>
-            <a:endParaRPr lang="zh-TW" altLang="en-US"/>
           </a:p>
         </p:txBody>
       </p:sp>
@@ -2725,7 +2538,7 @@
           <a:p>
             <a:pPr lvl="0"/>
             <a:r>
-              <a:rPr lang="zh-TW" altLang="en-US" smtClean="0"/>
+              <a:rPr lang="zh-TW" altLang="en-US"/>
               <a:t>按一下以編輯母片文字樣式</a:t>
             </a:r>
           </a:p>
@@ -2748,7 +2561,7 @@
           <a:p>
             <a:fld id="{8CEF99E1-8971-47CE-9963-3B0E513A77C7}" type="datetimeFigureOut">
               <a:rPr lang="zh-TW" altLang="en-US" smtClean="0"/>
-              <a:t>2020/7/5</a:t>
+              <a:t>2024/4/13</a:t>
             </a:fld>
             <a:endParaRPr lang="zh-TW" altLang="en-US"/>
           </a:p>
@@ -2846,10 +2659,9 @@
           </a:lstStyle>
           <a:p>
             <a:r>
-              <a:rPr lang="zh-TW" altLang="en-US" smtClean="0"/>
+              <a:rPr lang="zh-TW" altLang="en-US"/>
               <a:t>按一下以編輯母片標題樣式</a:t>
             </a:r>
-            <a:endParaRPr lang="zh-TW" altLang="en-US"/>
           </a:p>
         </p:txBody>
       </p:sp>
@@ -2911,10 +2723,9 @@
           </a:lstStyle>
           <a:p>
             <a:r>
-              <a:rPr lang="zh-TW" altLang="en-US" smtClean="0"/>
+              <a:rPr lang="zh-TW" altLang="en-US"/>
               <a:t>按一下圖示以新增圖片</a:t>
             </a:r>
-            <a:endParaRPr lang="zh-TW" altLang="en-US"/>
           </a:p>
         </p:txBody>
       </p:sp>
@@ -2977,7 +2788,7 @@
           <a:p>
             <a:pPr lvl="0"/>
             <a:r>
-              <a:rPr lang="zh-TW" altLang="en-US" smtClean="0"/>
+              <a:rPr lang="zh-TW" altLang="en-US"/>
               <a:t>按一下以編輯母片文字樣式</a:t>
             </a:r>
           </a:p>
@@ -3000,7 +2811,7 @@
           <a:p>
             <a:fld id="{8CEF99E1-8971-47CE-9963-3B0E513A77C7}" type="datetimeFigureOut">
               <a:rPr lang="zh-TW" altLang="en-US" smtClean="0"/>
-              <a:t>2020/7/5</a:t>
+              <a:t>2024/4/13</a:t>
             </a:fld>
             <a:endParaRPr lang="zh-TW" altLang="en-US"/>
           </a:p>
@@ -3109,10 +2920,9 @@
           <a:lstStyle/>
           <a:p>
             <a:r>
-              <a:rPr lang="zh-TW" altLang="en-US" smtClean="0"/>
+              <a:rPr lang="zh-TW" altLang="en-US"/>
               <a:t>按一下以編輯母片標題樣式</a:t>
             </a:r>
-            <a:endParaRPr lang="zh-TW" altLang="en-US"/>
           </a:p>
         </p:txBody>
       </p:sp>
@@ -3143,38 +2953,37 @@
           <a:p>
             <a:pPr lvl="0"/>
             <a:r>
-              <a:rPr lang="zh-TW" altLang="en-US" smtClean="0"/>
+              <a:rPr lang="zh-TW" altLang="en-US"/>
               <a:t>按一下以編輯母片文字樣式</a:t>
             </a:r>
           </a:p>
           <a:p>
             <a:pPr lvl="1"/>
             <a:r>
-              <a:rPr lang="zh-TW" altLang="en-US" smtClean="0"/>
+              <a:rPr lang="zh-TW" altLang="en-US"/>
               <a:t>第二層</a:t>
             </a:r>
           </a:p>
           <a:p>
             <a:pPr lvl="2"/>
             <a:r>
-              <a:rPr lang="zh-TW" altLang="en-US" smtClean="0"/>
+              <a:rPr lang="zh-TW" altLang="en-US"/>
               <a:t>第三層</a:t>
             </a:r>
           </a:p>
           <a:p>
             <a:pPr lvl="3"/>
             <a:r>
-              <a:rPr lang="zh-TW" altLang="en-US" smtClean="0"/>
+              <a:rPr lang="zh-TW" altLang="en-US"/>
               <a:t>第四層</a:t>
             </a:r>
           </a:p>
           <a:p>
             <a:pPr lvl="4"/>
             <a:r>
-              <a:rPr lang="zh-TW" altLang="en-US" smtClean="0"/>
+              <a:rPr lang="zh-TW" altLang="en-US"/>
               <a:t>第五層</a:t>
             </a:r>
-            <a:endParaRPr lang="zh-TW" altLang="en-US"/>
           </a:p>
         </p:txBody>
       </p:sp>
@@ -3213,7 +3022,7 @@
           <a:p>
             <a:fld id="{8CEF99E1-8971-47CE-9963-3B0E513A77C7}" type="datetimeFigureOut">
               <a:rPr lang="zh-TW" altLang="en-US" smtClean="0"/>
-              <a:t>2020/7/5</a:t>
+              <a:t>2024/4/13</a:t>
             </a:fld>
             <a:endParaRPr lang="zh-TW" altLang="en-US"/>
           </a:p>
@@ -3593,278 +3402,69 @@
             <p:ph type="title"/>
           </p:nvPr>
         </p:nvSpPr>
-        <p:spPr/>
+        <p:spPr>
+          <a:xfrm>
+            <a:off x="0" y="2660915"/>
+            <a:ext cx="12192000" cy="1143000"/>
+          </a:xfrm>
+        </p:spPr>
         <p:txBody>
           <a:bodyPr>
-            <a:normAutofit/>
+            <a:noAutofit/>
           </a:bodyPr>
           <a:lstStyle/>
           <a:p>
             <a:r>
-              <a:rPr lang="zh-TW" altLang="en-US" sz="4800" b="1" dirty="0" smtClean="0">
+              <a:rPr lang="zh-TW" altLang="en-US" sz="7200" b="1" i="1" dirty="0">
                 <a:solidFill>
                   <a:srgbClr val="000066"/>
                 </a:solidFill>
+                <a:effectLst>
+                  <a:outerShdw blurRad="38100" dist="38100" dir="2700000" algn="tl">
+                    <a:srgbClr val="000000">
+                      <a:alpha val="43137"/>
+                    </a:srgbClr>
+                  </a:outerShdw>
+                </a:effectLst>
                 <a:latin typeface="微軟正黑體" pitchFamily="34" charset="-120"/>
                 <a:ea typeface="微軟正黑體" pitchFamily="34" charset="-120"/>
               </a:rPr>
-              <a:t>住</a:t>
-            </a:r>
-            <a:r>
-              <a:rPr lang="zh-TW" altLang="en-US" sz="4800" b="1" dirty="0" smtClean="0">
+              <a:t>住在</a:t>
+            </a:r>
+            <a:r>
+              <a:rPr lang="zh-CN" altLang="en-US" sz="7200" b="1" i="1" dirty="0">
                 <a:solidFill>
                   <a:srgbClr val="000066"/>
                 </a:solidFill>
+                <a:effectLst>
+                  <a:outerShdw blurRad="38100" dist="38100" dir="2700000" algn="tl">
+                    <a:srgbClr val="000000">
+                      <a:alpha val="43137"/>
+                    </a:srgbClr>
+                  </a:outerShdw>
+                </a:effectLst>
                 <a:latin typeface="微軟正黑體" pitchFamily="34" charset="-120"/>
                 <a:ea typeface="微軟正黑體" pitchFamily="34" charset="-120"/>
               </a:rPr>
-              <a:t>在</a:t>
-            </a:r>
-            <a:r>
-              <a:rPr lang="zh-CN" altLang="en-US" sz="4800" b="1" dirty="0" smtClean="0">
+              <a:t>祢</a:t>
+            </a:r>
+            <a:r>
+              <a:rPr lang="zh-TW" altLang="en-US" sz="7200" b="1" i="1" dirty="0">
                 <a:solidFill>
                   <a:srgbClr val="000066"/>
                 </a:solidFill>
+                <a:effectLst>
+                  <a:outerShdw blurRad="38100" dist="38100" dir="2700000" algn="tl">
+                    <a:srgbClr val="000000">
+                      <a:alpha val="43137"/>
+                    </a:srgbClr>
+                  </a:outerShdw>
+                </a:effectLst>
                 <a:latin typeface="微軟正黑體" pitchFamily="34" charset="-120"/>
                 <a:ea typeface="微軟正黑體" pitchFamily="34" charset="-120"/>
               </a:rPr>
-              <a:t>袮</a:t>
-            </a:r>
-            <a:r>
-              <a:rPr lang="zh-TW" altLang="en-US" sz="4800" b="1" dirty="0" smtClean="0">
-                <a:solidFill>
-                  <a:srgbClr val="000066"/>
-                </a:solidFill>
-                <a:latin typeface="微軟正黑體" pitchFamily="34" charset="-120"/>
-                <a:ea typeface="微軟正黑體" pitchFamily="34" charset="-120"/>
-              </a:rPr>
-              <a:t>裡</a:t>
-            </a:r>
-            <a:r>
-              <a:rPr lang="zh-TW" altLang="en-US" sz="4800" b="1" dirty="0" smtClean="0">
-                <a:solidFill>
-                  <a:srgbClr val="000066"/>
-                </a:solidFill>
-                <a:latin typeface="微軟正黑體" pitchFamily="34" charset="-120"/>
-                <a:ea typeface="微軟正黑體" pitchFamily="34" charset="-120"/>
-              </a:rPr>
-              <a:t>面</a:t>
-            </a:r>
-            <a:endParaRPr lang="zh-TW" altLang="en-US" sz="4800" b="1" dirty="0">
-              <a:solidFill>
-                <a:srgbClr val="000066"/>
-              </a:solidFill>
-              <a:latin typeface="微軟正黑體" pitchFamily="34" charset="-120"/>
-              <a:ea typeface="微軟正黑體" pitchFamily="34" charset="-120"/>
-            </a:endParaRPr>
-          </a:p>
-        </p:txBody>
-      </p:sp>
-      <p:sp>
-        <p:nvSpPr>
-          <p:cNvPr id="5" name="內容版面配置區 4"/>
-          <p:cNvSpPr>
-            <a:spLocks noGrp="1"/>
-          </p:cNvSpPr>
-          <p:nvPr>
-            <p:ph idx="1"/>
-          </p:nvPr>
-        </p:nvSpPr>
-        <p:spPr/>
-        <p:txBody>
-          <a:bodyPr>
-            <a:noAutofit/>
-          </a:bodyPr>
-          <a:lstStyle/>
-          <a:p>
-            <a:pPr algn="ctr">
-              <a:buNone/>
-            </a:pPr>
-            <a:r>
-              <a:rPr lang="zh-TW" altLang="en-US" sz="5400" b="1" dirty="0">
-                <a:solidFill>
-                  <a:srgbClr val="000066"/>
-                </a:solidFill>
-                <a:latin typeface="微軟正黑體" pitchFamily="34" charset="-120"/>
-                <a:ea typeface="微軟正黑體" pitchFamily="34" charset="-120"/>
-              </a:rPr>
-              <a:t>在乾旱無水之地我渴</a:t>
-            </a:r>
-            <a:r>
-              <a:rPr lang="zh-TW" altLang="en-US" sz="5400" b="1" dirty="0" smtClean="0">
-                <a:solidFill>
-                  <a:srgbClr val="000066"/>
-                </a:solidFill>
-                <a:latin typeface="微軟正黑體" pitchFamily="34" charset="-120"/>
-                <a:ea typeface="微軟正黑體" pitchFamily="34" charset="-120"/>
-              </a:rPr>
-              <a:t>慕</a:t>
-            </a:r>
-            <a:r>
-              <a:rPr lang="zh-CN" altLang="en-US" sz="5400" b="1" dirty="0">
-                <a:solidFill>
-                  <a:srgbClr val="000066"/>
-                </a:solidFill>
-                <a:latin typeface="微軟正黑體" pitchFamily="34" charset="-120"/>
-                <a:ea typeface="微軟正黑體" pitchFamily="34" charset="-120"/>
-              </a:rPr>
-              <a:t>袮</a:t>
-            </a:r>
-            <a:endParaRPr lang="en-US" altLang="zh-TW" sz="5400" b="1" dirty="0">
-              <a:solidFill>
-                <a:srgbClr val="000066"/>
-              </a:solidFill>
-              <a:latin typeface="微軟正黑體" pitchFamily="34" charset="-120"/>
-              <a:ea typeface="微軟正黑體" pitchFamily="34" charset="-120"/>
-            </a:endParaRPr>
-          </a:p>
-          <a:p>
-            <a:pPr algn="ctr">
-              <a:buNone/>
-            </a:pPr>
-            <a:r>
-              <a:rPr lang="zh-TW" altLang="en-US" sz="5400" b="1" dirty="0">
-                <a:solidFill>
-                  <a:srgbClr val="000066"/>
-                </a:solidFill>
-                <a:latin typeface="微軟正黑體" pitchFamily="34" charset="-120"/>
-                <a:ea typeface="微軟正黑體" pitchFamily="34" charset="-120"/>
-              </a:rPr>
-              <a:t>在曠野無人之處我尋</a:t>
-            </a:r>
-            <a:r>
-              <a:rPr lang="zh-TW" altLang="en-US" sz="5400" b="1" dirty="0" smtClean="0">
-                <a:solidFill>
-                  <a:srgbClr val="000066"/>
-                </a:solidFill>
-                <a:latin typeface="微軟正黑體" pitchFamily="34" charset="-120"/>
-                <a:ea typeface="微軟正黑體" pitchFamily="34" charset="-120"/>
-              </a:rPr>
-              <a:t>求</a:t>
-            </a:r>
-            <a:r>
-              <a:rPr lang="zh-CN" altLang="en-US" sz="5400" b="1" dirty="0">
-                <a:solidFill>
-                  <a:srgbClr val="000066"/>
-                </a:solidFill>
-                <a:latin typeface="微軟正黑體" pitchFamily="34" charset="-120"/>
-                <a:ea typeface="微軟正黑體" pitchFamily="34" charset="-120"/>
-              </a:rPr>
-              <a:t>袮</a:t>
-            </a:r>
-            <a:endParaRPr lang="en-US" altLang="zh-TW" sz="5400" b="1" dirty="0">
-              <a:solidFill>
-                <a:srgbClr val="000066"/>
-              </a:solidFill>
-              <a:latin typeface="微軟正黑體" pitchFamily="34" charset="-120"/>
-              <a:ea typeface="微軟正黑體" pitchFamily="34" charset="-120"/>
-            </a:endParaRPr>
-          </a:p>
-          <a:p>
-            <a:pPr algn="ctr">
-              <a:buNone/>
-            </a:pPr>
-            <a:r>
-              <a:rPr lang="zh-TW" altLang="en-US" sz="5400" b="1" dirty="0">
-                <a:solidFill>
-                  <a:srgbClr val="000066"/>
-                </a:solidFill>
-                <a:latin typeface="微軟正黑體" pitchFamily="34" charset="-120"/>
-                <a:ea typeface="微軟正黑體" pitchFamily="34" charset="-120"/>
-              </a:rPr>
-              <a:t>得救在乎歸回安息</a:t>
-            </a:r>
-            <a:endParaRPr lang="en-US" altLang="zh-TW" sz="5400" b="1" dirty="0">
-              <a:solidFill>
-                <a:srgbClr val="000066"/>
-              </a:solidFill>
-              <a:latin typeface="微軟正黑體" pitchFamily="34" charset="-120"/>
-              <a:ea typeface="微軟正黑體" pitchFamily="34" charset="-120"/>
-            </a:endParaRPr>
-          </a:p>
-          <a:p>
-            <a:pPr algn="ctr">
-              <a:buNone/>
-            </a:pPr>
-            <a:r>
-              <a:rPr lang="zh-TW" altLang="en-US" sz="5400" b="1" dirty="0">
-                <a:solidFill>
-                  <a:srgbClr val="000066"/>
-                </a:solidFill>
-                <a:latin typeface="微軟正黑體" pitchFamily="34" charset="-120"/>
-                <a:ea typeface="微軟正黑體" pitchFamily="34" charset="-120"/>
-              </a:rPr>
-              <a:t>得力在乎平靜安穩</a:t>
-            </a:r>
-            <a:endParaRPr lang="en-US" altLang="zh-TW" sz="5400" b="1" dirty="0">
-              <a:solidFill>
-                <a:srgbClr val="000066"/>
-              </a:solidFill>
-              <a:latin typeface="微軟正黑體" pitchFamily="34" charset="-120"/>
-              <a:ea typeface="微軟正黑體" pitchFamily="34" charset="-120"/>
-            </a:endParaRPr>
-          </a:p>
-          <a:p>
-            <a:pPr algn="ctr">
-              <a:buNone/>
-            </a:pPr>
-            <a:r>
-              <a:rPr lang="zh-TW" altLang="en-US" sz="5400" b="1" dirty="0">
-                <a:solidFill>
-                  <a:srgbClr val="000066"/>
-                </a:solidFill>
-                <a:latin typeface="微軟正黑體" pitchFamily="34" charset="-120"/>
-                <a:ea typeface="微軟正黑體" pitchFamily="34" charset="-120"/>
-              </a:rPr>
-              <a:t>我等</a:t>
-            </a:r>
-            <a:r>
-              <a:rPr lang="zh-TW" altLang="en-US" sz="5400" b="1" dirty="0" smtClean="0">
-                <a:solidFill>
-                  <a:srgbClr val="000066"/>
-                </a:solidFill>
-                <a:latin typeface="微軟正黑體" pitchFamily="34" charset="-120"/>
-                <a:ea typeface="微軟正黑體" pitchFamily="34" charset="-120"/>
-              </a:rPr>
-              <a:t>候</a:t>
-            </a:r>
-            <a:r>
-              <a:rPr lang="zh-CN" altLang="en-US" sz="5400" b="1" dirty="0" smtClean="0">
-                <a:solidFill>
-                  <a:srgbClr val="000066"/>
-                </a:solidFill>
-                <a:latin typeface="微軟正黑體" pitchFamily="34" charset="-120"/>
-                <a:ea typeface="微軟正黑體" pitchFamily="34" charset="-120"/>
-              </a:rPr>
-              <a:t>袮  </a:t>
-            </a:r>
-            <a:r>
-              <a:rPr lang="zh-TW" altLang="en-US" sz="5400" b="1" dirty="0" smtClean="0">
-                <a:solidFill>
-                  <a:srgbClr val="000066"/>
-                </a:solidFill>
-                <a:latin typeface="微軟正黑體" pitchFamily="34" charset="-120"/>
-                <a:ea typeface="微軟正黑體" pitchFamily="34" charset="-120"/>
-              </a:rPr>
-              <a:t>如</a:t>
-            </a:r>
-            <a:r>
-              <a:rPr lang="zh-TW" altLang="en-US" sz="5400" b="1" dirty="0">
-                <a:solidFill>
-                  <a:srgbClr val="000066"/>
-                </a:solidFill>
-                <a:latin typeface="微軟正黑體" pitchFamily="34" charset="-120"/>
-                <a:ea typeface="微軟正黑體" pitchFamily="34" charset="-120"/>
-              </a:rPr>
-              <a:t>鷹展翅上騰</a:t>
-            </a:r>
-            <a:endParaRPr lang="zh-TW" altLang="en-US" sz="5400" b="1" dirty="0">
-              <a:solidFill>
-                <a:srgbClr val="000066"/>
-              </a:solidFill>
-              <a:latin typeface="微軟正黑體" pitchFamily="34" charset="-120"/>
-              <a:ea typeface="微軟正黑體" pitchFamily="34" charset="-120"/>
-            </a:endParaRPr>
+              <a:t>裡面</a:t>
+            </a:r>
           </a:p>
         </p:txBody>
       </p:sp>
@@ -3895,72 +3495,50 @@
       </p:grpSpPr>
       <p:sp>
         <p:nvSpPr>
-          <p:cNvPr id="4" name="標題 3"/>
-          <p:cNvSpPr>
-            <a:spLocks noGrp="1"/>
-          </p:cNvSpPr>
-          <p:nvPr>
-            <p:ph type="title"/>
-          </p:nvPr>
-        </p:nvSpPr>
-        <p:spPr/>
-        <p:txBody>
-          <a:bodyPr>
+          <p:cNvPr id="5" name="內容版面配置區 4"/>
+          <p:cNvSpPr>
+            <a:spLocks noGrp="1"/>
+          </p:cNvSpPr>
+          <p:nvPr>
+            <p:ph idx="1"/>
+          </p:nvPr>
+        </p:nvSpPr>
+        <p:spPr>
+          <a:xfrm>
+            <a:off x="0" y="2084851"/>
+            <a:ext cx="12192000" cy="2404863"/>
+          </a:xfrm>
+        </p:spPr>
+        <p:txBody>
+          <a:bodyPr anchor="ctr">
             <a:normAutofit/>
           </a:bodyPr>
           <a:lstStyle/>
           <a:p>
-            <a:r>
-              <a:rPr lang="zh-TW" altLang="en-US" sz="4800" b="1" dirty="0" smtClean="0">
+            <a:pPr algn="ctr">
+              <a:buNone/>
+            </a:pPr>
+            <a:r>
+              <a:rPr lang="zh-TW" altLang="en-US" sz="6400" b="1" dirty="0">
                 <a:solidFill>
                   <a:srgbClr val="000066"/>
                 </a:solidFill>
                 <a:latin typeface="微軟正黑體" pitchFamily="34" charset="-120"/>
                 <a:ea typeface="微軟正黑體" pitchFamily="34" charset="-120"/>
               </a:rPr>
-              <a:t>住</a:t>
-            </a:r>
-            <a:r>
-              <a:rPr lang="zh-TW" altLang="en-US" sz="4800" b="1" dirty="0" smtClean="0">
+              <a:t>在乾旱無水之地我渴慕</a:t>
+            </a:r>
+            <a:r>
+              <a:rPr lang="zh-CN" altLang="en-US" sz="6400" b="1" dirty="0">
                 <a:solidFill>
                   <a:srgbClr val="000066"/>
                 </a:solidFill>
                 <a:latin typeface="微軟正黑體" pitchFamily="34" charset="-120"/>
                 <a:ea typeface="微軟正黑體" pitchFamily="34" charset="-120"/>
               </a:rPr>
-              <a:t>在</a:t>
-            </a:r>
-            <a:r>
-              <a:rPr lang="zh-CN" altLang="en-US" sz="4800" b="1" dirty="0">
-                <a:solidFill>
-                  <a:srgbClr val="000066"/>
-                </a:solidFill>
-                <a:latin typeface="微軟正黑體" pitchFamily="34" charset="-120"/>
-                <a:ea typeface="微軟正黑體" pitchFamily="34" charset="-120"/>
-              </a:rPr>
-              <a:t>袮</a:t>
-            </a:r>
-            <a:r>
-              <a:rPr lang="zh-TW" altLang="en-US" sz="4800" b="1" dirty="0" smtClean="0">
-                <a:solidFill>
-                  <a:srgbClr val="000066"/>
-                </a:solidFill>
-                <a:latin typeface="微軟正黑體" pitchFamily="34" charset="-120"/>
-                <a:ea typeface="微軟正黑體" pitchFamily="34" charset="-120"/>
-              </a:rPr>
-              <a:t>裡</a:t>
-            </a:r>
-            <a:r>
-              <a:rPr lang="zh-TW" altLang="en-US" sz="4800" b="1" dirty="0" smtClean="0">
-                <a:solidFill>
-                  <a:srgbClr val="000066"/>
-                </a:solidFill>
-                <a:latin typeface="微軟正黑體" pitchFamily="34" charset="-120"/>
-                <a:ea typeface="微軟正黑體" pitchFamily="34" charset="-120"/>
-              </a:rPr>
-              <a:t>面</a:t>
-            </a:r>
-            <a:endParaRPr lang="zh-TW" altLang="en-US" sz="4800" b="1" dirty="0">
+              <a:t>祢</a:t>
+            </a:r>
+            <a:endParaRPr lang="en-US" altLang="zh-TW" sz="6400" b="1" dirty="0">
               <a:solidFill>
                 <a:srgbClr val="000066"/>
               </a:solidFill>
@@ -3968,124 +3546,31 @@
               <a:ea typeface="微軟正黑體" pitchFamily="34" charset="-120"/>
             </a:endParaRPr>
           </a:p>
-        </p:txBody>
-      </p:sp>
-      <p:sp>
-        <p:nvSpPr>
-          <p:cNvPr id="5" name="內容版面配置區 4"/>
-          <p:cNvSpPr>
-            <a:spLocks noGrp="1"/>
-          </p:cNvSpPr>
-          <p:nvPr>
-            <p:ph idx="1"/>
-          </p:nvPr>
-        </p:nvSpPr>
-        <p:spPr>
-          <a:xfrm>
-            <a:off x="1524000" y="1600201"/>
-            <a:ext cx="9144000" cy="4525963"/>
-          </a:xfrm>
-        </p:spPr>
-        <p:txBody>
-          <a:bodyPr>
-            <a:noAutofit/>
-          </a:bodyPr>
-          <a:lstStyle/>
           <a:p>
             <a:pPr algn="ctr">
               <a:buNone/>
             </a:pPr>
             <a:r>
-              <a:rPr lang="zh-TW" altLang="en-US" sz="5400" b="1" dirty="0">
+              <a:rPr lang="zh-TW" altLang="en-US" sz="6400" b="1" dirty="0">
                 <a:solidFill>
                   <a:srgbClr val="000066"/>
                 </a:solidFill>
                 <a:latin typeface="微軟正黑體" pitchFamily="34" charset="-120"/>
                 <a:ea typeface="微軟正黑體" pitchFamily="34" charset="-120"/>
               </a:rPr>
-              <a:t>住</a:t>
-            </a:r>
-            <a:r>
-              <a:rPr lang="zh-TW" altLang="en-US" sz="5400" b="1" dirty="0" smtClean="0">
+              <a:t>在曠野無人之處我尋求</a:t>
+            </a:r>
+            <a:r>
+              <a:rPr lang="zh-CN" altLang="en-US" sz="6400" b="1" dirty="0">
                 <a:solidFill>
                   <a:srgbClr val="000066"/>
                 </a:solidFill>
                 <a:latin typeface="微軟正黑體" pitchFamily="34" charset="-120"/>
                 <a:ea typeface="微軟正黑體" pitchFamily="34" charset="-120"/>
               </a:rPr>
-              <a:t>在</a:t>
-            </a:r>
-            <a:r>
-              <a:rPr lang="zh-CN" altLang="en-US" sz="5400" b="1" dirty="0">
-                <a:solidFill>
-                  <a:srgbClr val="000066"/>
-                </a:solidFill>
-                <a:latin typeface="微軟正黑體" pitchFamily="34" charset="-120"/>
-                <a:ea typeface="微軟正黑體" pitchFamily="34" charset="-120"/>
-              </a:rPr>
-              <a:t>袮</a:t>
-            </a:r>
-            <a:r>
-              <a:rPr lang="zh-TW" altLang="en-US" sz="5400" b="1" dirty="0" smtClean="0">
-                <a:solidFill>
-                  <a:srgbClr val="000066"/>
-                </a:solidFill>
-                <a:latin typeface="微軟正黑體" pitchFamily="34" charset="-120"/>
-                <a:ea typeface="微軟正黑體" pitchFamily="34" charset="-120"/>
-              </a:rPr>
-              <a:t>裡</a:t>
-            </a:r>
-            <a:r>
-              <a:rPr lang="zh-TW" altLang="en-US" sz="5400" b="1" dirty="0">
-                <a:solidFill>
-                  <a:srgbClr val="000066"/>
-                </a:solidFill>
-                <a:latin typeface="微軟正黑體" pitchFamily="34" charset="-120"/>
-                <a:ea typeface="微軟正黑體" pitchFamily="34" charset="-120"/>
-              </a:rPr>
-              <a:t>面  住</a:t>
-            </a:r>
-            <a:r>
-              <a:rPr lang="zh-TW" altLang="en-US" sz="5400" b="1" dirty="0" smtClean="0">
-                <a:solidFill>
-                  <a:srgbClr val="000066"/>
-                </a:solidFill>
-                <a:latin typeface="微軟正黑體" pitchFamily="34" charset="-120"/>
-                <a:ea typeface="微軟正黑體" pitchFamily="34" charset="-120"/>
-              </a:rPr>
-              <a:t>在</a:t>
-            </a:r>
-            <a:r>
-              <a:rPr lang="zh-CN" altLang="en-US" sz="5400" b="1" dirty="0">
-                <a:solidFill>
-                  <a:srgbClr val="000066"/>
-                </a:solidFill>
-                <a:latin typeface="微軟正黑體" pitchFamily="34" charset="-120"/>
-                <a:ea typeface="微軟正黑體" pitchFamily="34" charset="-120"/>
-              </a:rPr>
-              <a:t>袮</a:t>
-            </a:r>
-            <a:r>
-              <a:rPr lang="zh-TW" altLang="en-US" sz="5400" b="1" dirty="0" smtClean="0">
-                <a:solidFill>
-                  <a:srgbClr val="000066"/>
-                </a:solidFill>
-                <a:latin typeface="微軟正黑體" pitchFamily="34" charset="-120"/>
-                <a:ea typeface="微軟正黑體" pitchFamily="34" charset="-120"/>
-              </a:rPr>
-              <a:t>裡</a:t>
-            </a:r>
-            <a:r>
-              <a:rPr lang="zh-TW" altLang="en-US" sz="5400" b="1" dirty="0">
-                <a:solidFill>
-                  <a:srgbClr val="000066"/>
-                </a:solidFill>
-                <a:latin typeface="微軟正黑體" pitchFamily="34" charset="-120"/>
-                <a:ea typeface="微軟正黑體" pitchFamily="34" charset="-120"/>
-              </a:rPr>
-              <a:t>面</a:t>
-            </a:r>
-            <a:endParaRPr lang="en-US" altLang="zh-TW" sz="5400" b="1" dirty="0">
+              <a:t>祢</a:t>
+            </a:r>
+            <a:endParaRPr lang="en-US" altLang="zh-TW" sz="6400" b="1" dirty="0">
               <a:solidFill>
                 <a:srgbClr val="000066"/>
               </a:solidFill>
@@ -4093,21 +3578,131 @@
               <a:ea typeface="微軟正黑體" pitchFamily="34" charset="-120"/>
             </a:endParaRPr>
           </a:p>
+        </p:txBody>
+      </p:sp>
+      <p:sp>
+        <p:nvSpPr>
+          <p:cNvPr id="3" name="TextBox 2"/>
+          <p:cNvSpPr txBox="1"/>
+          <p:nvPr/>
+        </p:nvSpPr>
+        <p:spPr>
+          <a:xfrm>
+            <a:off x="0" y="5157193"/>
+            <a:ext cx="12192000" cy="584775"/>
+          </a:xfrm>
+          <a:prstGeom prst="rect">
+            <a:avLst/>
+          </a:prstGeom>
+          <a:noFill/>
+        </p:spPr>
+        <p:txBody>
+          <a:bodyPr wrap="square" rtlCol="0">
+            <a:spAutoFit/>
+          </a:bodyPr>
+          <a:lstStyle/>
+          <a:p>
+            <a:pPr algn="ctr"/>
+            <a:r>
+              <a:rPr lang="en-US" sz="3200" b="1" dirty="0">
+                <a:solidFill>
+                  <a:srgbClr val="000066"/>
+                </a:solidFill>
+                <a:latin typeface="Microsoft JhengHei" panose="020B0604030504040204" pitchFamily="34" charset="-120"/>
+                <a:ea typeface="Microsoft JhengHei" panose="020B0604030504040204" pitchFamily="34" charset="-120"/>
+              </a:rPr>
+              <a:t>( </a:t>
+            </a:r>
+            <a:r>
+              <a:rPr lang="zh-CN" altLang="en-US" sz="3200" b="1" dirty="0">
+                <a:solidFill>
+                  <a:srgbClr val="000066"/>
+                </a:solidFill>
+                <a:latin typeface="Microsoft JhengHei" panose="020B0604030504040204" pitchFamily="34" charset="-120"/>
+                <a:ea typeface="Microsoft JhengHei" panose="020B0604030504040204" pitchFamily="34" charset="-120"/>
+              </a:rPr>
+              <a:t>正歌</a:t>
+            </a:r>
+            <a:r>
+              <a:rPr lang="en-US" sz="3200" b="1" dirty="0">
+                <a:solidFill>
+                  <a:srgbClr val="000066"/>
+                </a:solidFill>
+                <a:latin typeface="Microsoft JhengHei" panose="020B0604030504040204" pitchFamily="34" charset="-120"/>
+                <a:ea typeface="Microsoft JhengHei" panose="020B0604030504040204" pitchFamily="34" charset="-120"/>
+              </a:rPr>
+              <a:t> )</a:t>
+            </a:r>
+            <a:endParaRPr lang="vi-VN" sz="3200" b="1" dirty="0">
+              <a:solidFill>
+                <a:srgbClr val="000066"/>
+              </a:solidFill>
+              <a:ea typeface="Microsoft JhengHei" panose="020B0604030504040204" pitchFamily="34" charset="-120"/>
+            </a:endParaRPr>
+          </a:p>
+        </p:txBody>
+      </p:sp>
+    </p:spTree>
+  </p:cSld>
+  <p:clrMapOvr>
+    <a:masterClrMapping/>
+  </p:clrMapOvr>
+</p:sld>
+</file>
+
+<file path=ppt/slides/slide3.xml><?xml version="1.0" encoding="utf-8"?>
+<p:sld xmlns:a="http://schemas.openxmlformats.org/drawingml/2006/main" xmlns:r="http://schemas.openxmlformats.org/officeDocument/2006/relationships" xmlns:p="http://schemas.openxmlformats.org/presentationml/2006/main">
+  <p:cSld>
+    <p:spTree>
+      <p:nvGrpSpPr>
+        <p:cNvPr id="1" name=""/>
+        <p:cNvGrpSpPr/>
+        <p:nvPr/>
+      </p:nvGrpSpPr>
+      <p:grpSpPr>
+        <a:xfrm>
+          <a:off x="0" y="0"/>
+          <a:ext cx="0" cy="0"/>
+          <a:chOff x="0" y="0"/>
+          <a:chExt cx="0" cy="0"/>
+        </a:xfrm>
+      </p:grpSpPr>
+      <p:sp>
+        <p:nvSpPr>
+          <p:cNvPr id="5" name="內容版面配置區 4"/>
+          <p:cNvSpPr>
+            <a:spLocks noGrp="1"/>
+          </p:cNvSpPr>
+          <p:nvPr>
+            <p:ph idx="1"/>
+          </p:nvPr>
+        </p:nvSpPr>
+        <p:spPr>
+          <a:xfrm>
+            <a:off x="0" y="2084851"/>
+            <a:ext cx="12192000" cy="2404863"/>
+          </a:xfrm>
+        </p:spPr>
+        <p:txBody>
+          <a:bodyPr anchor="ctr">
+            <a:normAutofit/>
+          </a:bodyPr>
+          <a:lstStyle/>
           <a:p>
             <a:pPr algn="ctr">
               <a:buNone/>
             </a:pPr>
             <a:r>
-              <a:rPr lang="zh-TW" altLang="en-US" sz="5400" b="1" dirty="0">
+              <a:rPr lang="zh-TW" altLang="en-US" sz="6400" b="1" dirty="0">
                 <a:solidFill>
                   <a:srgbClr val="000066"/>
                 </a:solidFill>
                 <a:latin typeface="微軟正黑體" pitchFamily="34" charset="-120"/>
                 <a:ea typeface="微軟正黑體" pitchFamily="34" charset="-120"/>
               </a:rPr>
-              <a:t>如同枝子與葡萄樹緊緊相連</a:t>
-            </a:r>
-            <a:endParaRPr lang="en-US" altLang="zh-TW" sz="5400" b="1" dirty="0">
+              <a:t>得救在乎歸回安息</a:t>
+            </a:r>
+            <a:endParaRPr lang="en-US" altLang="zh-TW" sz="6400" b="1" dirty="0">
               <a:solidFill>
                 <a:srgbClr val="000066"/>
               </a:solidFill>
@@ -4120,96 +3715,16 @@
               <a:buNone/>
             </a:pPr>
             <a:r>
-              <a:rPr lang="zh-TW" altLang="en-US" sz="5400" b="1" dirty="0">
+              <a:rPr lang="zh-TW" altLang="en-US" sz="6400" b="1" dirty="0">
                 <a:solidFill>
                   <a:srgbClr val="000066"/>
                 </a:solidFill>
                 <a:latin typeface="微軟正黑體" pitchFamily="34" charset="-120"/>
                 <a:ea typeface="微軟正黑體" pitchFamily="34" charset="-120"/>
               </a:rPr>
-              <a:t>住</a:t>
-            </a:r>
-            <a:r>
-              <a:rPr lang="zh-TW" altLang="en-US" sz="5400" b="1" dirty="0" smtClean="0">
-                <a:solidFill>
-                  <a:srgbClr val="000066"/>
-                </a:solidFill>
-                <a:latin typeface="微軟正黑體" pitchFamily="34" charset="-120"/>
-                <a:ea typeface="微軟正黑體" pitchFamily="34" charset="-120"/>
-              </a:rPr>
-              <a:t>在</a:t>
-            </a:r>
-            <a:r>
-              <a:rPr lang="zh-CN" altLang="en-US" sz="5400" b="1" dirty="0">
-                <a:solidFill>
-                  <a:srgbClr val="000066"/>
-                </a:solidFill>
-                <a:latin typeface="微軟正黑體" pitchFamily="34" charset="-120"/>
-                <a:ea typeface="微軟正黑體" pitchFamily="34" charset="-120"/>
-              </a:rPr>
-              <a:t>袮</a:t>
-            </a:r>
-            <a:r>
-              <a:rPr lang="zh-TW" altLang="en-US" sz="5400" b="1" dirty="0" smtClean="0">
-                <a:solidFill>
-                  <a:srgbClr val="000066"/>
-                </a:solidFill>
-                <a:latin typeface="微軟正黑體" pitchFamily="34" charset="-120"/>
-                <a:ea typeface="微軟正黑體" pitchFamily="34" charset="-120"/>
-              </a:rPr>
-              <a:t>裡</a:t>
-            </a:r>
-            <a:r>
-              <a:rPr lang="zh-TW" altLang="en-US" sz="5400" b="1" dirty="0">
-                <a:solidFill>
-                  <a:srgbClr val="000066"/>
-                </a:solidFill>
-                <a:latin typeface="微軟正黑體" pitchFamily="34" charset="-120"/>
-                <a:ea typeface="微軟正黑體" pitchFamily="34" charset="-120"/>
-              </a:rPr>
-              <a:t>面  住</a:t>
-            </a:r>
-            <a:r>
-              <a:rPr lang="zh-TW" altLang="en-US" sz="5400" b="1" dirty="0" smtClean="0">
-                <a:solidFill>
-                  <a:srgbClr val="000066"/>
-                </a:solidFill>
-                <a:latin typeface="微軟正黑體" pitchFamily="34" charset="-120"/>
-                <a:ea typeface="微軟正黑體" pitchFamily="34" charset="-120"/>
-              </a:rPr>
-              <a:t>在</a:t>
-            </a:r>
-            <a:r>
-              <a:rPr lang="zh-CN" altLang="en-US" sz="5400" b="1" dirty="0">
-                <a:solidFill>
-                  <a:srgbClr val="000066"/>
-                </a:solidFill>
-                <a:latin typeface="微軟正黑體" pitchFamily="34" charset="-120"/>
-                <a:ea typeface="微軟正黑體" pitchFamily="34" charset="-120"/>
-              </a:rPr>
-              <a:t>袮</a:t>
-            </a:r>
-            <a:r>
-              <a:rPr lang="zh-TW" altLang="en-US" sz="5400" b="1" dirty="0" smtClean="0">
-                <a:solidFill>
-                  <a:srgbClr val="000066"/>
-                </a:solidFill>
-                <a:latin typeface="微軟正黑體" pitchFamily="34" charset="-120"/>
-                <a:ea typeface="微軟正黑體" pitchFamily="34" charset="-120"/>
-              </a:rPr>
-              <a:t>裡</a:t>
-            </a:r>
-            <a:r>
-              <a:rPr lang="zh-TW" altLang="en-US" sz="5400" b="1" dirty="0">
-                <a:solidFill>
-                  <a:srgbClr val="000066"/>
-                </a:solidFill>
-                <a:latin typeface="微軟正黑體" pitchFamily="34" charset="-120"/>
-                <a:ea typeface="微軟正黑體" pitchFamily="34" charset="-120"/>
-              </a:rPr>
-              <a:t>面</a:t>
-            </a:r>
-            <a:endParaRPr lang="en-US" altLang="zh-TW" sz="5400" b="1" dirty="0">
+              <a:t>得力在乎平靜安穩</a:t>
+            </a:r>
+            <a:endParaRPr lang="en-US" altLang="zh-TW" sz="6400" b="1" dirty="0">
               <a:solidFill>
                 <a:srgbClr val="000066"/>
               </a:solidFill>
@@ -4217,12 +3732,538 @@
               <a:ea typeface="微軟正黑體" pitchFamily="34" charset="-120"/>
             </a:endParaRPr>
           </a:p>
+        </p:txBody>
+      </p:sp>
+      <p:sp>
+        <p:nvSpPr>
+          <p:cNvPr id="3" name="TextBox 2"/>
+          <p:cNvSpPr txBox="1"/>
+          <p:nvPr/>
+        </p:nvSpPr>
+        <p:spPr>
+          <a:xfrm>
+            <a:off x="0" y="5157193"/>
+            <a:ext cx="12192000" cy="584775"/>
+          </a:xfrm>
+          <a:prstGeom prst="rect">
+            <a:avLst/>
+          </a:prstGeom>
+          <a:noFill/>
+        </p:spPr>
+        <p:txBody>
+          <a:bodyPr wrap="square" rtlCol="0">
+            <a:spAutoFit/>
+          </a:bodyPr>
+          <a:lstStyle/>
+          <a:p>
+            <a:pPr algn="ctr"/>
+            <a:r>
+              <a:rPr lang="en-US" sz="3200" b="1" dirty="0">
+                <a:solidFill>
+                  <a:srgbClr val="000066"/>
+                </a:solidFill>
+                <a:latin typeface="Microsoft JhengHei" panose="020B0604030504040204" pitchFamily="34" charset="-120"/>
+                <a:ea typeface="Microsoft JhengHei" panose="020B0604030504040204" pitchFamily="34" charset="-120"/>
+              </a:rPr>
+              <a:t>( </a:t>
+            </a:r>
+            <a:r>
+              <a:rPr lang="zh-CN" altLang="en-US" sz="3200" b="1" dirty="0">
+                <a:solidFill>
+                  <a:srgbClr val="000066"/>
+                </a:solidFill>
+                <a:latin typeface="Microsoft JhengHei" panose="020B0604030504040204" pitchFamily="34" charset="-120"/>
+                <a:ea typeface="Microsoft JhengHei" panose="020B0604030504040204" pitchFamily="34" charset="-120"/>
+              </a:rPr>
+              <a:t>正歌</a:t>
+            </a:r>
+            <a:r>
+              <a:rPr lang="en-US" sz="3200" b="1" dirty="0">
+                <a:solidFill>
+                  <a:srgbClr val="000066"/>
+                </a:solidFill>
+                <a:latin typeface="Microsoft JhengHei" panose="020B0604030504040204" pitchFamily="34" charset="-120"/>
+                <a:ea typeface="Microsoft JhengHei" panose="020B0604030504040204" pitchFamily="34" charset="-120"/>
+              </a:rPr>
+              <a:t> )</a:t>
+            </a:r>
+            <a:endParaRPr lang="vi-VN" sz="3200" b="1" dirty="0">
+              <a:solidFill>
+                <a:srgbClr val="000066"/>
+              </a:solidFill>
+              <a:ea typeface="Microsoft JhengHei" panose="020B0604030504040204" pitchFamily="34" charset="-120"/>
+            </a:endParaRPr>
+          </a:p>
+        </p:txBody>
+      </p:sp>
+    </p:spTree>
+    <p:extLst>
+      <p:ext uri="{BB962C8B-B14F-4D97-AF65-F5344CB8AC3E}">
+        <p14:creationId xmlns:p14="http://schemas.microsoft.com/office/powerpoint/2010/main" val="2349957921"/>
+      </p:ext>
+    </p:extLst>
+  </p:cSld>
+  <p:clrMapOvr>
+    <a:masterClrMapping/>
+  </p:clrMapOvr>
+</p:sld>
+</file>
+
+<file path=ppt/slides/slide4.xml><?xml version="1.0" encoding="utf-8"?>
+<p:sld xmlns:a="http://schemas.openxmlformats.org/drawingml/2006/main" xmlns:r="http://schemas.openxmlformats.org/officeDocument/2006/relationships" xmlns:p="http://schemas.openxmlformats.org/presentationml/2006/main">
+  <p:cSld>
+    <p:spTree>
+      <p:nvGrpSpPr>
+        <p:cNvPr id="1" name=""/>
+        <p:cNvGrpSpPr/>
+        <p:nvPr/>
+      </p:nvGrpSpPr>
+      <p:grpSpPr>
+        <a:xfrm>
+          <a:off x="0" y="0"/>
+          <a:ext cx="0" cy="0"/>
+          <a:chOff x="0" y="0"/>
+          <a:chExt cx="0" cy="0"/>
+        </a:xfrm>
+      </p:grpSpPr>
+      <p:sp>
+        <p:nvSpPr>
+          <p:cNvPr id="5" name="內容版面配置區 4"/>
+          <p:cNvSpPr>
+            <a:spLocks noGrp="1"/>
+          </p:cNvSpPr>
+          <p:nvPr>
+            <p:ph idx="1"/>
+          </p:nvPr>
+        </p:nvSpPr>
+        <p:spPr>
+          <a:xfrm>
+            <a:off x="0" y="2084851"/>
+            <a:ext cx="12192000" cy="2404863"/>
+          </a:xfrm>
+        </p:spPr>
+        <p:txBody>
+          <a:bodyPr anchor="ctr">
+            <a:normAutofit/>
+          </a:bodyPr>
+          <a:lstStyle/>
           <a:p>
             <a:pPr algn="ctr">
               <a:buNone/>
             </a:pPr>
             <a:r>
-              <a:rPr lang="zh-TW" altLang="en-US" sz="5400" b="1" dirty="0">
+              <a:rPr lang="zh-TW" altLang="en-US" sz="6400" b="1" dirty="0">
+                <a:solidFill>
+                  <a:srgbClr val="000066"/>
+                </a:solidFill>
+                <a:latin typeface="微軟正黑體" pitchFamily="34" charset="-120"/>
+                <a:ea typeface="微軟正黑體" pitchFamily="34" charset="-120"/>
+              </a:rPr>
+              <a:t>我等候</a:t>
+            </a:r>
+            <a:r>
+              <a:rPr lang="zh-CN" altLang="en-US" sz="6400" b="1" dirty="0">
+                <a:solidFill>
+                  <a:srgbClr val="000066"/>
+                </a:solidFill>
+                <a:latin typeface="微軟正黑體" pitchFamily="34" charset="-120"/>
+                <a:ea typeface="微軟正黑體" pitchFamily="34" charset="-120"/>
+              </a:rPr>
+              <a:t>祢  </a:t>
+            </a:r>
+            <a:r>
+              <a:rPr lang="zh-TW" altLang="en-US" sz="6400" b="1" dirty="0">
+                <a:solidFill>
+                  <a:srgbClr val="000066"/>
+                </a:solidFill>
+                <a:latin typeface="微軟正黑體" pitchFamily="34" charset="-120"/>
+                <a:ea typeface="微軟正黑體" pitchFamily="34" charset="-120"/>
+              </a:rPr>
+              <a:t>如鷹展翅上騰</a:t>
+            </a:r>
+          </a:p>
+        </p:txBody>
+      </p:sp>
+      <p:sp>
+        <p:nvSpPr>
+          <p:cNvPr id="3" name="TextBox 2"/>
+          <p:cNvSpPr txBox="1"/>
+          <p:nvPr/>
+        </p:nvSpPr>
+        <p:spPr>
+          <a:xfrm>
+            <a:off x="0" y="5157193"/>
+            <a:ext cx="12192000" cy="584775"/>
+          </a:xfrm>
+          <a:prstGeom prst="rect">
+            <a:avLst/>
+          </a:prstGeom>
+          <a:noFill/>
+        </p:spPr>
+        <p:txBody>
+          <a:bodyPr wrap="square" rtlCol="0">
+            <a:spAutoFit/>
+          </a:bodyPr>
+          <a:lstStyle/>
+          <a:p>
+            <a:pPr algn="ctr"/>
+            <a:r>
+              <a:rPr lang="en-US" sz="3200" b="1" dirty="0">
+                <a:solidFill>
+                  <a:srgbClr val="000066"/>
+                </a:solidFill>
+                <a:latin typeface="Microsoft JhengHei" panose="020B0604030504040204" pitchFamily="34" charset="-120"/>
+                <a:ea typeface="Microsoft JhengHei" panose="020B0604030504040204" pitchFamily="34" charset="-120"/>
+              </a:rPr>
+              <a:t>( </a:t>
+            </a:r>
+            <a:r>
+              <a:rPr lang="zh-CN" altLang="en-US" sz="3200" b="1" dirty="0">
+                <a:solidFill>
+                  <a:srgbClr val="000066"/>
+                </a:solidFill>
+                <a:latin typeface="Microsoft JhengHei" panose="020B0604030504040204" pitchFamily="34" charset="-120"/>
+                <a:ea typeface="Microsoft JhengHei" panose="020B0604030504040204" pitchFamily="34" charset="-120"/>
+              </a:rPr>
+              <a:t>正歌</a:t>
+            </a:r>
+            <a:r>
+              <a:rPr lang="en-US" sz="3200" b="1" dirty="0">
+                <a:solidFill>
+                  <a:srgbClr val="000066"/>
+                </a:solidFill>
+                <a:latin typeface="Microsoft JhengHei" panose="020B0604030504040204" pitchFamily="34" charset="-120"/>
+                <a:ea typeface="Microsoft JhengHei" panose="020B0604030504040204" pitchFamily="34" charset="-120"/>
+              </a:rPr>
+              <a:t> )</a:t>
+            </a:r>
+            <a:endParaRPr lang="vi-VN" sz="3200" b="1" dirty="0">
+              <a:solidFill>
+                <a:srgbClr val="000066"/>
+              </a:solidFill>
+              <a:ea typeface="Microsoft JhengHei" panose="020B0604030504040204" pitchFamily="34" charset="-120"/>
+            </a:endParaRPr>
+          </a:p>
+        </p:txBody>
+      </p:sp>
+    </p:spTree>
+    <p:extLst>
+      <p:ext uri="{BB962C8B-B14F-4D97-AF65-F5344CB8AC3E}">
+        <p14:creationId xmlns:p14="http://schemas.microsoft.com/office/powerpoint/2010/main" val="1761858128"/>
+      </p:ext>
+    </p:extLst>
+  </p:cSld>
+  <p:clrMapOvr>
+    <a:masterClrMapping/>
+  </p:clrMapOvr>
+</p:sld>
+</file>
+
+<file path=ppt/slides/slide5.xml><?xml version="1.0" encoding="utf-8"?>
+<p:sld xmlns:a="http://schemas.openxmlformats.org/drawingml/2006/main" xmlns:r="http://schemas.openxmlformats.org/officeDocument/2006/relationships" xmlns:p="http://schemas.openxmlformats.org/presentationml/2006/main">
+  <p:cSld>
+    <p:spTree>
+      <p:nvGrpSpPr>
+        <p:cNvPr id="1" name=""/>
+        <p:cNvGrpSpPr/>
+        <p:nvPr/>
+      </p:nvGrpSpPr>
+      <p:grpSpPr>
+        <a:xfrm>
+          <a:off x="0" y="0"/>
+          <a:ext cx="0" cy="0"/>
+          <a:chOff x="0" y="0"/>
+          <a:chExt cx="0" cy="0"/>
+        </a:xfrm>
+      </p:grpSpPr>
+      <p:sp>
+        <p:nvSpPr>
+          <p:cNvPr id="5" name="內容版面配置區 4"/>
+          <p:cNvSpPr>
+            <a:spLocks noGrp="1"/>
+          </p:cNvSpPr>
+          <p:nvPr>
+            <p:ph idx="1"/>
+          </p:nvPr>
+        </p:nvSpPr>
+        <p:spPr>
+          <a:xfrm>
+            <a:off x="0" y="2084851"/>
+            <a:ext cx="12192000" cy="2404863"/>
+          </a:xfrm>
+        </p:spPr>
+        <p:txBody>
+          <a:bodyPr anchor="ctr">
+            <a:normAutofit/>
+          </a:bodyPr>
+          <a:lstStyle/>
+          <a:p>
+            <a:pPr algn="ctr">
+              <a:buNone/>
+            </a:pPr>
+            <a:r>
+              <a:rPr lang="zh-TW" altLang="en-US" sz="6400" b="1" dirty="0">
+                <a:solidFill>
+                  <a:srgbClr val="000066"/>
+                </a:solidFill>
+                <a:latin typeface="微軟正黑體" pitchFamily="34" charset="-120"/>
+                <a:ea typeface="微軟正黑體" pitchFamily="34" charset="-120"/>
+              </a:rPr>
+              <a:t>住在</a:t>
+            </a:r>
+            <a:r>
+              <a:rPr lang="zh-CN" altLang="en-US" sz="6400" b="1" dirty="0">
+                <a:solidFill>
+                  <a:srgbClr val="000066"/>
+                </a:solidFill>
+                <a:latin typeface="微軟正黑體" pitchFamily="34" charset="-120"/>
+                <a:ea typeface="微軟正黑體" pitchFamily="34" charset="-120"/>
+              </a:rPr>
+              <a:t>祢</a:t>
+            </a:r>
+            <a:r>
+              <a:rPr lang="zh-TW" altLang="en-US" sz="6400" b="1" dirty="0">
+                <a:solidFill>
+                  <a:srgbClr val="000066"/>
+                </a:solidFill>
+                <a:latin typeface="微軟正黑體" pitchFamily="34" charset="-120"/>
+                <a:ea typeface="微軟正黑體" pitchFamily="34" charset="-120"/>
+              </a:rPr>
+              <a:t>裡面  住在</a:t>
+            </a:r>
+            <a:r>
+              <a:rPr lang="zh-CN" altLang="en-US" sz="6400" b="1" dirty="0">
+                <a:solidFill>
+                  <a:srgbClr val="000066"/>
+                </a:solidFill>
+                <a:latin typeface="微軟正黑體" pitchFamily="34" charset="-120"/>
+                <a:ea typeface="微軟正黑體" pitchFamily="34" charset="-120"/>
+              </a:rPr>
+              <a:t>祢</a:t>
+            </a:r>
+            <a:r>
+              <a:rPr lang="zh-TW" altLang="en-US" sz="6400" b="1" dirty="0">
+                <a:solidFill>
+                  <a:srgbClr val="000066"/>
+                </a:solidFill>
+                <a:latin typeface="微軟正黑體" pitchFamily="34" charset="-120"/>
+                <a:ea typeface="微軟正黑體" pitchFamily="34" charset="-120"/>
+              </a:rPr>
+              <a:t>裡面</a:t>
+            </a:r>
+            <a:endParaRPr lang="en-US" altLang="zh-TW" sz="6400" b="1" dirty="0">
+              <a:solidFill>
+                <a:srgbClr val="000066"/>
+              </a:solidFill>
+              <a:latin typeface="微軟正黑體" pitchFamily="34" charset="-120"/>
+              <a:ea typeface="微軟正黑體" pitchFamily="34" charset="-120"/>
+            </a:endParaRPr>
+          </a:p>
+          <a:p>
+            <a:pPr algn="ctr">
+              <a:buNone/>
+            </a:pPr>
+            <a:r>
+              <a:rPr lang="zh-TW" altLang="en-US" sz="6400" b="1" dirty="0">
+                <a:solidFill>
+                  <a:srgbClr val="000066"/>
+                </a:solidFill>
+                <a:latin typeface="微軟正黑體" pitchFamily="34" charset="-120"/>
+                <a:ea typeface="微軟正黑體" pitchFamily="34" charset="-120"/>
+              </a:rPr>
+              <a:t>如同枝子與葡萄樹緊緊相連</a:t>
+            </a:r>
+            <a:endParaRPr lang="en-US" altLang="zh-TW" sz="6400" b="1" dirty="0">
+              <a:solidFill>
+                <a:srgbClr val="000066"/>
+              </a:solidFill>
+              <a:latin typeface="微軟正黑體" pitchFamily="34" charset="-120"/>
+              <a:ea typeface="微軟正黑體" pitchFamily="34" charset="-120"/>
+            </a:endParaRPr>
+          </a:p>
+        </p:txBody>
+      </p:sp>
+      <p:sp>
+        <p:nvSpPr>
+          <p:cNvPr id="3" name="TextBox 2"/>
+          <p:cNvSpPr txBox="1"/>
+          <p:nvPr/>
+        </p:nvSpPr>
+        <p:spPr>
+          <a:xfrm>
+            <a:off x="0" y="5157193"/>
+            <a:ext cx="12192000" cy="584775"/>
+          </a:xfrm>
+          <a:prstGeom prst="rect">
+            <a:avLst/>
+          </a:prstGeom>
+          <a:noFill/>
+        </p:spPr>
+        <p:txBody>
+          <a:bodyPr wrap="square" rtlCol="0">
+            <a:spAutoFit/>
+          </a:bodyPr>
+          <a:lstStyle/>
+          <a:p>
+            <a:pPr algn="ctr"/>
+            <a:r>
+              <a:rPr lang="en-US" sz="3200" b="1" dirty="0">
+                <a:solidFill>
+                  <a:srgbClr val="000066"/>
+                </a:solidFill>
+                <a:latin typeface="Microsoft JhengHei" panose="020B0604030504040204" pitchFamily="34" charset="-120"/>
+                <a:ea typeface="Microsoft JhengHei" panose="020B0604030504040204" pitchFamily="34" charset="-120"/>
+              </a:rPr>
+              <a:t>( </a:t>
+            </a:r>
+            <a:r>
+              <a:rPr lang="zh-CN" altLang="en-US" sz="3200" b="1" dirty="0">
+                <a:solidFill>
+                  <a:srgbClr val="000066"/>
+                </a:solidFill>
+                <a:latin typeface="Microsoft JhengHei" panose="020B0604030504040204" pitchFamily="34" charset="-120"/>
+                <a:ea typeface="Microsoft JhengHei" panose="020B0604030504040204" pitchFamily="34" charset="-120"/>
+              </a:rPr>
+              <a:t>副歌</a:t>
+            </a:r>
+            <a:r>
+              <a:rPr lang="en-US" sz="3200" b="1" dirty="0">
+                <a:solidFill>
+                  <a:srgbClr val="000066"/>
+                </a:solidFill>
+                <a:latin typeface="Microsoft JhengHei" panose="020B0604030504040204" pitchFamily="34" charset="-120"/>
+                <a:ea typeface="Microsoft JhengHei" panose="020B0604030504040204" pitchFamily="34" charset="-120"/>
+              </a:rPr>
+              <a:t> )</a:t>
+            </a:r>
+            <a:endParaRPr lang="vi-VN" sz="3200" b="1" dirty="0">
+              <a:solidFill>
+                <a:srgbClr val="000066"/>
+              </a:solidFill>
+              <a:ea typeface="Microsoft JhengHei" panose="020B0604030504040204" pitchFamily="34" charset="-120"/>
+            </a:endParaRPr>
+          </a:p>
+        </p:txBody>
+      </p:sp>
+    </p:spTree>
+    <p:extLst>
+      <p:ext uri="{BB962C8B-B14F-4D97-AF65-F5344CB8AC3E}">
+        <p14:creationId xmlns:p14="http://schemas.microsoft.com/office/powerpoint/2010/main" val="1910379000"/>
+      </p:ext>
+    </p:extLst>
+  </p:cSld>
+  <p:clrMapOvr>
+    <a:masterClrMapping/>
+  </p:clrMapOvr>
+</p:sld>
+</file>
+
+<file path=ppt/slides/slide6.xml><?xml version="1.0" encoding="utf-8"?>
+<p:sld xmlns:a="http://schemas.openxmlformats.org/drawingml/2006/main" xmlns:r="http://schemas.openxmlformats.org/officeDocument/2006/relationships" xmlns:p="http://schemas.openxmlformats.org/presentationml/2006/main">
+  <p:cSld>
+    <p:spTree>
+      <p:nvGrpSpPr>
+        <p:cNvPr id="1" name=""/>
+        <p:cNvGrpSpPr/>
+        <p:nvPr/>
+      </p:nvGrpSpPr>
+      <p:grpSpPr>
+        <a:xfrm>
+          <a:off x="0" y="0"/>
+          <a:ext cx="0" cy="0"/>
+          <a:chOff x="0" y="0"/>
+          <a:chExt cx="0" cy="0"/>
+        </a:xfrm>
+      </p:grpSpPr>
+      <p:sp>
+        <p:nvSpPr>
+          <p:cNvPr id="5" name="內容版面配置區 4"/>
+          <p:cNvSpPr>
+            <a:spLocks noGrp="1"/>
+          </p:cNvSpPr>
+          <p:nvPr>
+            <p:ph idx="1"/>
+          </p:nvPr>
+        </p:nvSpPr>
+        <p:spPr>
+          <a:xfrm>
+            <a:off x="0" y="2084851"/>
+            <a:ext cx="12192000" cy="2404863"/>
+          </a:xfrm>
+        </p:spPr>
+        <p:txBody>
+          <a:bodyPr anchor="ctr">
+            <a:normAutofit/>
+          </a:bodyPr>
+          <a:lstStyle/>
+          <a:p>
+            <a:pPr algn="ctr">
+              <a:buNone/>
+            </a:pPr>
+            <a:r>
+              <a:rPr lang="zh-TW" altLang="en-US" sz="6400" b="1" dirty="0">
+                <a:solidFill>
+                  <a:srgbClr val="000066"/>
+                </a:solidFill>
+                <a:latin typeface="微軟正黑體" pitchFamily="34" charset="-120"/>
+                <a:ea typeface="微軟正黑體" pitchFamily="34" charset="-120"/>
+              </a:rPr>
+              <a:t>住在</a:t>
+            </a:r>
+            <a:r>
+              <a:rPr lang="zh-CN" altLang="en-US" sz="6400" b="1" dirty="0">
+                <a:solidFill>
+                  <a:srgbClr val="000066"/>
+                </a:solidFill>
+                <a:latin typeface="微軟正黑體" pitchFamily="34" charset="-120"/>
+                <a:ea typeface="微軟正黑體" pitchFamily="34" charset="-120"/>
+              </a:rPr>
+              <a:t>祢</a:t>
+            </a:r>
+            <a:r>
+              <a:rPr lang="zh-TW" altLang="en-US" sz="6400" b="1" dirty="0">
+                <a:solidFill>
+                  <a:srgbClr val="000066"/>
+                </a:solidFill>
+                <a:latin typeface="微軟正黑體" pitchFamily="34" charset="-120"/>
+                <a:ea typeface="微軟正黑體" pitchFamily="34" charset="-120"/>
+              </a:rPr>
+              <a:t>裡面  住在</a:t>
+            </a:r>
+            <a:r>
+              <a:rPr lang="zh-CN" altLang="en-US" sz="6400" b="1" dirty="0">
+                <a:solidFill>
+                  <a:srgbClr val="000066"/>
+                </a:solidFill>
+                <a:latin typeface="微軟正黑體" pitchFamily="34" charset="-120"/>
+                <a:ea typeface="微軟正黑體" pitchFamily="34" charset="-120"/>
+              </a:rPr>
+              <a:t>祢</a:t>
+            </a:r>
+            <a:r>
+              <a:rPr lang="zh-TW" altLang="en-US" sz="6400" b="1" dirty="0">
+                <a:solidFill>
+                  <a:srgbClr val="000066"/>
+                </a:solidFill>
+                <a:latin typeface="微軟正黑體" pitchFamily="34" charset="-120"/>
+                <a:ea typeface="微軟正黑體" pitchFamily="34" charset="-120"/>
+              </a:rPr>
+              <a:t>裡面</a:t>
+            </a:r>
+            <a:endParaRPr lang="en-US" altLang="zh-TW" sz="6400" b="1" dirty="0">
+              <a:solidFill>
+                <a:srgbClr val="000066"/>
+              </a:solidFill>
+              <a:latin typeface="微軟正黑體" pitchFamily="34" charset="-120"/>
+              <a:ea typeface="微軟正黑體" pitchFamily="34" charset="-120"/>
+            </a:endParaRPr>
+          </a:p>
+          <a:p>
+            <a:pPr algn="ctr">
+              <a:buNone/>
+            </a:pPr>
+            <a:r>
+              <a:rPr lang="zh-TW" altLang="en-US" sz="6400" b="1" dirty="0">
                 <a:solidFill>
                   <a:srgbClr val="000066"/>
                 </a:solidFill>
@@ -4234,7 +4275,74 @@
           </a:p>
         </p:txBody>
       </p:sp>
+      <p:sp>
+        <p:nvSpPr>
+          <p:cNvPr id="3" name="TextBox 2"/>
+          <p:cNvSpPr txBox="1"/>
+          <p:nvPr/>
+        </p:nvSpPr>
+        <p:spPr>
+          <a:xfrm>
+            <a:off x="0" y="5157193"/>
+            <a:ext cx="12192000" cy="584775"/>
+          </a:xfrm>
+          <a:prstGeom prst="rect">
+            <a:avLst/>
+          </a:prstGeom>
+          <a:noFill/>
+        </p:spPr>
+        <p:txBody>
+          <a:bodyPr wrap="square" rtlCol="0">
+            <a:spAutoFit/>
+          </a:bodyPr>
+          <a:lstStyle/>
+          <a:p>
+            <a:pPr algn="ctr"/>
+            <a:r>
+              <a:rPr lang="en-US" sz="3200" b="1" dirty="0">
+                <a:solidFill>
+                  <a:srgbClr val="000066"/>
+                </a:solidFill>
+                <a:latin typeface="Microsoft JhengHei" panose="020B0604030504040204" pitchFamily="34" charset="-120"/>
+                <a:ea typeface="Microsoft JhengHei" panose="020B0604030504040204" pitchFamily="34" charset="-120"/>
+              </a:rPr>
+              <a:t>( </a:t>
+            </a:r>
+            <a:r>
+              <a:rPr lang="zh-CN" altLang="en-US" sz="3200" b="1" dirty="0">
+                <a:solidFill>
+                  <a:srgbClr val="000066"/>
+                </a:solidFill>
+                <a:latin typeface="Microsoft JhengHei" panose="020B0604030504040204" pitchFamily="34" charset="-120"/>
+                <a:ea typeface="Microsoft JhengHei" panose="020B0604030504040204" pitchFamily="34" charset="-120"/>
+              </a:rPr>
+              <a:t>副歌</a:t>
+            </a:r>
+            <a:r>
+              <a:rPr lang="en-US" sz="3200" b="1" dirty="0">
+                <a:solidFill>
+                  <a:srgbClr val="000066"/>
+                </a:solidFill>
+                <a:latin typeface="Microsoft JhengHei" panose="020B0604030504040204" pitchFamily="34" charset="-120"/>
+                <a:ea typeface="Microsoft JhengHei" panose="020B0604030504040204" pitchFamily="34" charset="-120"/>
+              </a:rPr>
+              <a:t> )</a:t>
+            </a:r>
+            <a:endParaRPr lang="vi-VN" sz="3200" b="1" dirty="0">
+              <a:solidFill>
+                <a:srgbClr val="000066"/>
+              </a:solidFill>
+              <a:ea typeface="Microsoft JhengHei" panose="020B0604030504040204" pitchFamily="34" charset="-120"/>
+            </a:endParaRPr>
+          </a:p>
+        </p:txBody>
+      </p:sp>
     </p:spTree>
+    <p:extLst>
+      <p:ext uri="{BB962C8B-B14F-4D97-AF65-F5344CB8AC3E}">
+        <p14:creationId xmlns:p14="http://schemas.microsoft.com/office/powerpoint/2010/main" val="3112779707"/>
+      </p:ext>
+    </p:extLst>
   </p:cSld>
   <p:clrMapOvr>
     <a:masterClrMapping/>
